--- a/Personal_Finance_Analyzer_Presentation.pptx
+++ b/Personal_Finance_Analyzer_Presentation.pptx
@@ -9,7 +9,8 @@
     <p:sldId id="257" r:id="rId3"/>
     <p:sldId id="258" r:id="rId4"/>
     <p:sldId id="259" r:id="rId5"/>
-    <p:sldId id="260" r:id="rId6"/>
+    <p:sldId id="261" r:id="rId6"/>
+    <p:sldId id="260" r:id="rId7"/>
   </p:sldIdLst>
   <p:sldSz cx="12192000" cy="6858000"/>
   <p:notesSz cx="6858000" cy="9144000"/>
@@ -108,7 +109,88 @@
       </a:defRPr>
     </a:lvl9pPr>
   </p:defaultTextStyle>
+  <p:extLst>
+    <p:ext uri="{EFAFB233-063F-42B5-8137-9DF3F51BA10A}">
+      <p15:sldGuideLst xmlns:p15="http://schemas.microsoft.com/office/powerpoint/2012/main"/>
+    </p:ext>
+  </p:extLst>
 </p:presentation>
+</file>
+
+<file path=ppt/revisionInfo.xml><?xml version="1.0" encoding="utf-8"?>
+<p1510:revInfo xmlns:a="http://schemas.openxmlformats.org/drawingml/2006/main" xmlns:r="http://schemas.openxmlformats.org/officeDocument/2006/relationships" xmlns:p1510="http://schemas.microsoft.com/office/powerpoint/2015/10/main">
+  <p1510:revLst>
+    <p1510:client id="{A0BCF8D1-5CDF-4C8E-8EEC-72E339403B60}" v="3" dt="2026-01-12T12:48:10.834"/>
+  </p1510:revLst>
+</p1510:revInfo>
+</file>
+
+<file path=ppt/changesInfos/changesInfo1.xml><?xml version="1.0" encoding="utf-8"?>
+<pc:chgInfo xmlns:a="http://schemas.openxmlformats.org/drawingml/2006/main" xmlns:r="http://schemas.openxmlformats.org/officeDocument/2006/relationships" xmlns:ac="http://schemas.microsoft.com/office/drawing/2013/main/command" xmlns:pc="http://schemas.microsoft.com/office/powerpoint/2013/main/command">
+  <pc:docChgLst>
+    <pc:chgData name="Jasper croijmans" userId="f86dc323274ef115" providerId="LiveId" clId="{6C9886B6-BF27-4343-B6DC-256FC21F34CE}"/>
+    <pc:docChg chg="undo custSel addSld modSld">
+      <pc:chgData name="Jasper croijmans" userId="f86dc323274ef115" providerId="LiveId" clId="{6C9886B6-BF27-4343-B6DC-256FC21F34CE}" dt="2026-01-12T13:00:47.446" v="1111" actId="20577"/>
+      <pc:docMkLst>
+        <pc:docMk/>
+      </pc:docMkLst>
+      <pc:sldChg chg="addSp delSp modSp mod">
+        <pc:chgData name="Jasper croijmans" userId="f86dc323274ef115" providerId="LiveId" clId="{6C9886B6-BF27-4343-B6DC-256FC21F34CE}" dt="2026-01-12T12:48:15.087" v="727" actId="20577"/>
+        <pc:sldMkLst>
+          <pc:docMk/>
+          <pc:sldMk cId="3130542668" sldId="259"/>
+        </pc:sldMkLst>
+        <pc:spChg chg="mod">
+          <ac:chgData name="Jasper croijmans" userId="f86dc323274ef115" providerId="LiveId" clId="{6C9886B6-BF27-4343-B6DC-256FC21F34CE}" dt="2026-01-12T12:48:15.087" v="727" actId="20577"/>
+          <ac:spMkLst>
+            <pc:docMk/>
+            <pc:sldMk cId="3130542668" sldId="259"/>
+            <ac:spMk id="4" creationId="{17C9ECEF-0A35-305F-7C04-71A915591B36}"/>
+          </ac:spMkLst>
+        </pc:spChg>
+        <pc:spChg chg="add del mod">
+          <ac:chgData name="Jasper croijmans" userId="f86dc323274ef115" providerId="LiveId" clId="{6C9886B6-BF27-4343-B6DC-256FC21F34CE}" dt="2026-01-12T12:47:42.748" v="707"/>
+          <ac:spMkLst>
+            <pc:docMk/>
+            <pc:sldMk cId="3130542668" sldId="259"/>
+            <ac:spMk id="5" creationId="{F6589A1A-A4CD-9460-21F6-98B4FBCE0DCC}"/>
+          </ac:spMkLst>
+        </pc:spChg>
+      </pc:sldChg>
+      <pc:sldChg chg="addSp modSp new mod">
+        <pc:chgData name="Jasper croijmans" userId="f86dc323274ef115" providerId="LiveId" clId="{6C9886B6-BF27-4343-B6DC-256FC21F34CE}" dt="2026-01-12T13:00:47.446" v="1111" actId="20577"/>
+        <pc:sldMkLst>
+          <pc:docMk/>
+          <pc:sldMk cId="2699811895" sldId="261"/>
+        </pc:sldMkLst>
+        <pc:spChg chg="mod">
+          <ac:chgData name="Jasper croijmans" userId="f86dc323274ef115" providerId="LiveId" clId="{6C9886B6-BF27-4343-B6DC-256FC21F34CE}" dt="2026-01-12T12:48:03.321" v="725" actId="20577"/>
+          <ac:spMkLst>
+            <pc:docMk/>
+            <pc:sldMk cId="2699811895" sldId="261"/>
+            <ac:spMk id="2" creationId="{546F54CD-9153-FB0D-D8B7-378F29E0E05D}"/>
+          </ac:spMkLst>
+        </pc:spChg>
+        <pc:spChg chg="mod">
+          <ac:chgData name="Jasper croijmans" userId="f86dc323274ef115" providerId="LiveId" clId="{6C9886B6-BF27-4343-B6DC-256FC21F34CE}" dt="2026-01-12T12:59:24.584" v="1096" actId="20577"/>
+          <ac:spMkLst>
+            <pc:docMk/>
+            <pc:sldMk cId="2699811895" sldId="261"/>
+            <ac:spMk id="3" creationId="{433C2EBB-9C9C-7C93-7661-C9C0DE1509F8}"/>
+          </ac:spMkLst>
+        </pc:spChg>
+        <pc:graphicFrameChg chg="add mod modGraphic">
+          <ac:chgData name="Jasper croijmans" userId="f86dc323274ef115" providerId="LiveId" clId="{6C9886B6-BF27-4343-B6DC-256FC21F34CE}" dt="2026-01-12T13:00:47.446" v="1111" actId="20577"/>
+          <ac:graphicFrameMkLst>
+            <pc:docMk/>
+            <pc:sldMk cId="2699811895" sldId="261"/>
+            <ac:graphicFrameMk id="4" creationId="{D79B46F8-860A-57F5-E960-FA4885911392}"/>
+          </ac:graphicFrameMkLst>
+        </pc:graphicFrameChg>
+      </pc:sldChg>
+    </pc:docChg>
+  </pc:docChgLst>
+</pc:chgInfo>
 </file>
 
 <file path=ppt/slideLayouts/slideLayout1.xml><?xml version="1.0" encoding="utf-8"?>
@@ -262,7 +344,7 @@
           <a:p>
             <a:fld id="{11008460-8B2F-4AAA-A4E2-10730069204C}" type="datetimeFigureOut">
               <a:rPr lang="en-US" smtClean="0"/>
-              <a:t>1/6/2026</a:t>
+              <a:t>1/12/2026</a:t>
             </a:fld>
             <a:endParaRPr lang="en-US"/>
           </a:p>
@@ -2606,7 +2688,7 @@
           <a:p>
             <a:fld id="{11008460-8B2F-4AAA-A4E2-10730069204C}" type="datetimeFigureOut">
               <a:rPr lang="en-US" smtClean="0"/>
-              <a:t>1/6/2026</a:t>
+              <a:t>1/12/2026</a:t>
             </a:fld>
             <a:endParaRPr lang="en-US"/>
           </a:p>
@@ -4950,7 +5032,7 @@
           <a:p>
             <a:fld id="{11008460-8B2F-4AAA-A4E2-10730069204C}" type="datetimeFigureOut">
               <a:rPr lang="en-US" smtClean="0"/>
-              <a:t>1/6/2026</a:t>
+              <a:t>1/12/2026</a:t>
             </a:fld>
             <a:endParaRPr lang="en-US"/>
           </a:p>
@@ -5148,7 +5230,7 @@
           <a:p>
             <a:fld id="{11008460-8B2F-4AAA-A4E2-10730069204C}" type="datetimeFigureOut">
               <a:rPr lang="en-US" smtClean="0"/>
-              <a:t>1/6/2026</a:t>
+              <a:t>1/12/2026</a:t>
             </a:fld>
             <a:endParaRPr lang="en-US"/>
           </a:p>
@@ -5421,7 +5503,7 @@
           <a:p>
             <a:fld id="{11008460-8B2F-4AAA-A4E2-10730069204C}" type="datetimeFigureOut">
               <a:rPr lang="en-US" smtClean="0"/>
-              <a:t>1/6/2026</a:t>
+              <a:t>1/12/2026</a:t>
             </a:fld>
             <a:endParaRPr lang="en-US"/>
           </a:p>
@@ -5686,7 +5768,7 @@
           <a:p>
             <a:fld id="{11008460-8B2F-4AAA-A4E2-10730069204C}" type="datetimeFigureOut">
               <a:rPr lang="en-US" smtClean="0"/>
-              <a:t>1/6/2026</a:t>
+              <a:t>1/12/2026</a:t>
             </a:fld>
             <a:endParaRPr lang="en-US"/>
           </a:p>
@@ -6102,7 +6184,7 @@
           <a:p>
             <a:fld id="{11008460-8B2F-4AAA-A4E2-10730069204C}" type="datetimeFigureOut">
               <a:rPr lang="en-US" smtClean="0"/>
-              <a:t>1/6/2026</a:t>
+              <a:t>1/12/2026</a:t>
             </a:fld>
             <a:endParaRPr lang="en-US"/>
           </a:p>
@@ -6243,7 +6325,7 @@
           <a:p>
             <a:fld id="{11008460-8B2F-4AAA-A4E2-10730069204C}" type="datetimeFigureOut">
               <a:rPr lang="en-US" smtClean="0"/>
-              <a:t>1/6/2026</a:t>
+              <a:t>1/12/2026</a:t>
             </a:fld>
             <a:endParaRPr lang="en-US"/>
           </a:p>
@@ -6356,7 +6438,7 @@
           <a:p>
             <a:fld id="{11008460-8B2F-4AAA-A4E2-10730069204C}" type="datetimeFigureOut">
               <a:rPr lang="en-US" smtClean="0"/>
-              <a:t>1/6/2026</a:t>
+              <a:t>1/12/2026</a:t>
             </a:fld>
             <a:endParaRPr lang="en-US"/>
           </a:p>
@@ -6667,7 +6749,7 @@
           <a:p>
             <a:fld id="{11008460-8B2F-4AAA-A4E2-10730069204C}" type="datetimeFigureOut">
               <a:rPr lang="en-US" smtClean="0"/>
-              <a:t>1/6/2026</a:t>
+              <a:t>1/12/2026</a:t>
             </a:fld>
             <a:endParaRPr lang="en-US"/>
           </a:p>
@@ -6955,7 +7037,7 @@
           <a:p>
             <a:fld id="{11008460-8B2F-4AAA-A4E2-10730069204C}" type="datetimeFigureOut">
               <a:rPr lang="en-US" smtClean="0"/>
-              <a:t>1/6/2026</a:t>
+              <a:t>1/12/2026</a:t>
             </a:fld>
             <a:endParaRPr lang="en-US"/>
           </a:p>
@@ -9333,7 +9415,7 @@
             <a:fld id="{11008460-8B2F-4AAA-A4E2-10730069204C}" type="datetimeFigureOut">
               <a:rPr lang="en-US" smtClean="0"/>
               <a:pPr/>
-              <a:t>1/6/2026</a:t>
+              <a:t>1/12/2026</a:t>
             </a:fld>
             <a:endParaRPr lang="en-US" dirty="0"/>
           </a:p>
@@ -11585,7 +11667,7 @@
         <p:spPr>
           <a:xfrm>
             <a:off x="4847303" y="2248257"/>
-            <a:ext cx="3844413" cy="1631216"/>
+            <a:ext cx="3844413" cy="1938992"/>
           </a:xfrm>
           <a:prstGeom prst="rect">
             <a:avLst/>
@@ -11618,13 +11700,13 @@
           <a:p>
             <a:r>
               <a:rPr lang="en-US" sz="2000" dirty="0"/>
-              <a:t>✓ Predicted next month: €2086</a:t>
+              <a:t>✓ Predicted month (December 2025): €2086</a:t>
             </a:r>
           </a:p>
           <a:p>
             <a:r>
               <a:rPr lang="en-US" sz="2000" dirty="0"/>
-              <a:t>X Actual spending: €2395  </a:t>
+              <a:t>  </a:t>
             </a:r>
             <a:endParaRPr lang="nl-NL" sz="2000" dirty="0"/>
           </a:p>
@@ -11644,6 +11726,492 @@
 </file>
 
 <file path=ppt/slides/slide5.xml><?xml version="1.0" encoding="utf-8"?>
+<p:sld xmlns:a="http://schemas.openxmlformats.org/drawingml/2006/main" xmlns:r="http://schemas.openxmlformats.org/officeDocument/2006/relationships" xmlns:p="http://schemas.openxmlformats.org/presentationml/2006/main">
+  <p:cSld>
+    <p:spTree>
+      <p:nvGrpSpPr>
+        <p:cNvPr id="1" name=""/>
+        <p:cNvGrpSpPr/>
+        <p:nvPr/>
+      </p:nvGrpSpPr>
+      <p:grpSpPr>
+        <a:xfrm>
+          <a:off x="0" y="0"/>
+          <a:ext cx="0" cy="0"/>
+          <a:chOff x="0" y="0"/>
+          <a:chExt cx="0" cy="0"/>
+        </a:xfrm>
+      </p:grpSpPr>
+      <p:sp>
+        <p:nvSpPr>
+          <p:cNvPr id="2" name="Titel 1">
+            <a:extLst>
+              <a:ext uri="{FF2B5EF4-FFF2-40B4-BE49-F238E27FC236}">
+                <a16:creationId xmlns:a16="http://schemas.microsoft.com/office/drawing/2014/main" id="{546F54CD-9153-FB0D-D8B7-378F29E0E05D}"/>
+              </a:ext>
+            </a:extLst>
+          </p:cNvPr>
+          <p:cNvSpPr>
+            <a:spLocks noGrp="1"/>
+          </p:cNvSpPr>
+          <p:nvPr>
+            <p:ph type="title"/>
+          </p:nvPr>
+        </p:nvSpPr>
+        <p:spPr/>
+        <p:txBody>
+          <a:bodyPr/>
+          <a:lstStyle/>
+          <a:p>
+            <a:r>
+              <a:rPr lang="nl-NL" dirty="0" err="1"/>
+              <a:t>Actual</a:t>
+            </a:r>
+            <a:r>
+              <a:rPr lang="nl-NL" dirty="0"/>
+              <a:t> </a:t>
+            </a:r>
+            <a:r>
+              <a:rPr lang="nl-NL" dirty="0" err="1"/>
+              <a:t>spending</a:t>
+            </a:r>
+            <a:endParaRPr lang="nl-NL" dirty="0"/>
+          </a:p>
+        </p:txBody>
+      </p:sp>
+      <p:sp>
+        <p:nvSpPr>
+          <p:cNvPr id="3" name="Tijdelijke aanduiding voor inhoud 2">
+            <a:extLst>
+              <a:ext uri="{FF2B5EF4-FFF2-40B4-BE49-F238E27FC236}">
+                <a16:creationId xmlns:a16="http://schemas.microsoft.com/office/drawing/2014/main" id="{433C2EBB-9C9C-7C93-7661-C9C0DE1509F8}"/>
+              </a:ext>
+            </a:extLst>
+          </p:cNvPr>
+          <p:cNvSpPr>
+            <a:spLocks noGrp="1"/>
+          </p:cNvSpPr>
+          <p:nvPr>
+            <p:ph idx="1"/>
+          </p:nvPr>
+        </p:nvSpPr>
+        <p:spPr/>
+        <p:txBody>
+          <a:bodyPr/>
+          <a:lstStyle/>
+          <a:p>
+            <a:r>
+              <a:rPr lang="en-US" dirty="0"/>
+              <a:t>Actual spending: €2395 </a:t>
+            </a:r>
+          </a:p>
+          <a:p>
+            <a:endParaRPr lang="en-US" dirty="0"/>
+          </a:p>
+          <a:p>
+            <a:r>
+              <a:rPr lang="en-US" dirty="0"/>
+              <a:t>Of by €309 </a:t>
+            </a:r>
+          </a:p>
+          <a:p>
+            <a:endParaRPr lang="en-US" dirty="0"/>
+          </a:p>
+          <a:p>
+            <a:r>
+              <a:rPr lang="en-US" dirty="0"/>
+              <a:t>1 really big abnormal </a:t>
+            </a:r>
+            <a:r>
+              <a:rPr lang="en-US" dirty="0" err="1"/>
+              <a:t>expens</a:t>
+            </a:r>
+            <a:r>
+              <a:rPr lang="en-US" dirty="0"/>
+              <a:t> of €860 (hospital)</a:t>
+            </a:r>
+          </a:p>
+          <a:p>
+            <a:r>
+              <a:rPr lang="en-US" dirty="0"/>
+              <a:t>December no bars: €426 predicted saved</a:t>
+            </a:r>
+          </a:p>
+          <a:p>
+            <a:r>
+              <a:rPr lang="en-US" dirty="0"/>
+              <a:t>Hospital </a:t>
+            </a:r>
+            <a:r>
+              <a:rPr lang="en-US" dirty="0" err="1"/>
+              <a:t>expens</a:t>
+            </a:r>
+            <a:r>
+              <a:rPr lang="en-US" dirty="0"/>
+              <a:t> that was free: €200 (given price) saved</a:t>
+            </a:r>
+          </a:p>
+          <a:p>
+            <a:endParaRPr lang="nl-NL" dirty="0"/>
+          </a:p>
+        </p:txBody>
+      </p:sp>
+      <p:graphicFrame>
+        <p:nvGraphicFramePr>
+          <p:cNvPr id="4" name="Tabel 3">
+            <a:extLst>
+              <a:ext uri="{FF2B5EF4-FFF2-40B4-BE49-F238E27FC236}">
+                <a16:creationId xmlns:a16="http://schemas.microsoft.com/office/drawing/2014/main" id="{D79B46F8-860A-57F5-E960-FA4885911392}"/>
+              </a:ext>
+            </a:extLst>
+          </p:cNvPr>
+          <p:cNvGraphicFramePr>
+            <a:graphicFrameLocks noGrp="1"/>
+          </p:cNvGraphicFramePr>
+          <p:nvPr>
+            <p:extLst>
+              <p:ext uri="{D42A27DB-BD31-4B8C-83A1-F6EECF244321}">
+                <p14:modId xmlns:p14="http://schemas.microsoft.com/office/powerpoint/2010/main" val="3883442823"/>
+              </p:ext>
+            </p:extLst>
+          </p:nvPr>
+        </p:nvGraphicFramePr>
+        <p:xfrm>
+          <a:off x="5980176" y="1282184"/>
+          <a:ext cx="4600448" cy="2865120"/>
+        </p:xfrm>
+        <a:graphic>
+          <a:graphicData uri="http://schemas.openxmlformats.org/drawingml/2006/table">
+            <a:tbl>
+              <a:tblPr firstRow="1" bandRow="1">
+                <a:tableStyleId>{5C22544A-7EE6-4342-B048-85BDC9FD1C3A}</a:tableStyleId>
+              </a:tblPr>
+              <a:tblGrid>
+                <a:gridCol w="2300224">
+                  <a:extLst>
+                    <a:ext uri="{9D8B030D-6E8A-4147-A177-3AD203B41FA5}">
+                      <a16:colId xmlns:a16="http://schemas.microsoft.com/office/drawing/2014/main" val="3670627041"/>
+                    </a:ext>
+                  </a:extLst>
+                </a:gridCol>
+                <a:gridCol w="2300224">
+                  <a:extLst>
+                    <a:ext uri="{9D8B030D-6E8A-4147-A177-3AD203B41FA5}">
+                      <a16:colId xmlns:a16="http://schemas.microsoft.com/office/drawing/2014/main" val="1863378179"/>
+                    </a:ext>
+                  </a:extLst>
+                </a:gridCol>
+              </a:tblGrid>
+              <a:tr h="370840">
+                <a:tc>
+                  <a:txBody>
+                    <a:bodyPr/>
+                    <a:lstStyle/>
+                    <a:p>
+                      <a:endParaRPr lang="nl-NL" dirty="0"/>
+                    </a:p>
+                  </a:txBody>
+                  <a:tcPr/>
+                </a:tc>
+                <a:tc>
+                  <a:txBody>
+                    <a:bodyPr/>
+                    <a:lstStyle/>
+                    <a:p>
+                      <a:endParaRPr lang="nl-NL" dirty="0"/>
+                    </a:p>
+                  </a:txBody>
+                  <a:tcPr/>
+                </a:tc>
+                <a:extLst>
+                  <a:ext uri="{0D108BD9-81ED-4DB2-BD59-A6C34878D82A}">
+                    <a16:rowId xmlns:a16="http://schemas.microsoft.com/office/drawing/2014/main" val="1578596996"/>
+                  </a:ext>
+                </a:extLst>
+              </a:tr>
+              <a:tr h="370840">
+                <a:tc>
+                  <a:txBody>
+                    <a:bodyPr/>
+                    <a:lstStyle/>
+                    <a:p>
+                      <a:r>
+                        <a:rPr lang="nl-NL" dirty="0" err="1"/>
+                        <a:t>Actual</a:t>
+                      </a:r>
+                      <a:r>
+                        <a:rPr lang="nl-NL" dirty="0"/>
+                        <a:t> </a:t>
+                      </a:r>
+                      <a:r>
+                        <a:rPr lang="nl-NL" dirty="0" err="1"/>
+                        <a:t>amount</a:t>
+                      </a:r>
+                      <a:endParaRPr lang="nl-NL" dirty="0"/>
+                    </a:p>
+                  </a:txBody>
+                  <a:tcPr/>
+                </a:tc>
+                <a:tc>
+                  <a:txBody>
+                    <a:bodyPr/>
+                    <a:lstStyle/>
+                    <a:p>
+                      <a:r>
+                        <a:rPr lang="nl-NL" dirty="0"/>
+                        <a:t>€2395</a:t>
+                      </a:r>
+                    </a:p>
+                  </a:txBody>
+                  <a:tcPr/>
+                </a:tc>
+                <a:extLst>
+                  <a:ext uri="{0D108BD9-81ED-4DB2-BD59-A6C34878D82A}">
+                    <a16:rowId xmlns:a16="http://schemas.microsoft.com/office/drawing/2014/main" val="486313344"/>
+                  </a:ext>
+                </a:extLst>
+              </a:tr>
+              <a:tr h="370840">
+                <a:tc>
+                  <a:txBody>
+                    <a:bodyPr/>
+                    <a:lstStyle/>
+                    <a:p>
+                      <a:r>
+                        <a:rPr lang="nl-NL" dirty="0"/>
+                        <a:t>Big </a:t>
+                      </a:r>
+                      <a:r>
+                        <a:rPr lang="nl-NL" dirty="0" err="1"/>
+                        <a:t>expens</a:t>
+                      </a:r>
+                      <a:endParaRPr lang="nl-NL" dirty="0"/>
+                    </a:p>
+                  </a:txBody>
+                  <a:tcPr/>
+                </a:tc>
+                <a:tc>
+                  <a:txBody>
+                    <a:bodyPr/>
+                    <a:lstStyle/>
+                    <a:p>
+                      <a:r>
+                        <a:rPr lang="nl-NL" dirty="0"/>
+                        <a:t>- €860</a:t>
+                      </a:r>
+                    </a:p>
+                  </a:txBody>
+                  <a:tcPr/>
+                </a:tc>
+                <a:extLst>
+                  <a:ext uri="{0D108BD9-81ED-4DB2-BD59-A6C34878D82A}">
+                    <a16:rowId xmlns:a16="http://schemas.microsoft.com/office/drawing/2014/main" val="2543541918"/>
+                  </a:ext>
+                </a:extLst>
+              </a:tr>
+              <a:tr h="370840">
+                <a:tc>
+                  <a:txBody>
+                    <a:bodyPr/>
+                    <a:lstStyle/>
+                    <a:p>
+                      <a:r>
+                        <a:rPr lang="nl-NL" dirty="0"/>
+                        <a:t>No bars</a:t>
+                      </a:r>
+                    </a:p>
+                  </a:txBody>
+                  <a:tcPr/>
+                </a:tc>
+                <a:tc>
+                  <a:txBody>
+                    <a:bodyPr/>
+                    <a:lstStyle/>
+                    <a:p>
+                      <a:r>
+                        <a:rPr lang="nl-NL" dirty="0"/>
+                        <a:t>+€426</a:t>
+                      </a:r>
+                    </a:p>
+                  </a:txBody>
+                  <a:tcPr/>
+                </a:tc>
+                <a:extLst>
+                  <a:ext uri="{0D108BD9-81ED-4DB2-BD59-A6C34878D82A}">
+                    <a16:rowId xmlns:a16="http://schemas.microsoft.com/office/drawing/2014/main" val="2622730470"/>
+                  </a:ext>
+                </a:extLst>
+              </a:tr>
+              <a:tr h="370840">
+                <a:tc>
+                  <a:txBody>
+                    <a:bodyPr/>
+                    <a:lstStyle/>
+                    <a:p>
+                      <a:r>
+                        <a:rPr lang="nl-NL" dirty="0" err="1"/>
+                        <a:t>Hospital</a:t>
+                      </a:r>
+                      <a:r>
+                        <a:rPr lang="nl-NL" dirty="0"/>
+                        <a:t> </a:t>
+                      </a:r>
+                      <a:r>
+                        <a:rPr lang="nl-NL" dirty="0" err="1"/>
+                        <a:t>bill</a:t>
+                      </a:r>
+                      <a:r>
+                        <a:rPr lang="nl-NL" dirty="0"/>
+                        <a:t> </a:t>
+                      </a:r>
+                    </a:p>
+                  </a:txBody>
+                  <a:tcPr/>
+                </a:tc>
+                <a:tc>
+                  <a:txBody>
+                    <a:bodyPr/>
+                    <a:lstStyle/>
+                    <a:p>
+                      <a:r>
+                        <a:rPr lang="nl-NL" dirty="0"/>
+                        <a:t>+€200</a:t>
+                      </a:r>
+                    </a:p>
+                  </a:txBody>
+                  <a:tcPr/>
+                </a:tc>
+                <a:extLst>
+                  <a:ext uri="{0D108BD9-81ED-4DB2-BD59-A6C34878D82A}">
+                    <a16:rowId xmlns:a16="http://schemas.microsoft.com/office/drawing/2014/main" val="3300663231"/>
+                  </a:ext>
+                </a:extLst>
+              </a:tr>
+              <a:tr h="370840">
+                <a:tc>
+                  <a:txBody>
+                    <a:bodyPr/>
+                    <a:lstStyle/>
+                    <a:p>
+                      <a:r>
+                        <a:rPr lang="nl-NL" dirty="0" err="1"/>
+                        <a:t>Spending</a:t>
+                      </a:r>
+                      <a:r>
+                        <a:rPr lang="nl-NL" dirty="0"/>
+                        <a:t> </a:t>
+                      </a:r>
+                      <a:r>
+                        <a:rPr lang="nl-NL" dirty="0" err="1"/>
+                        <a:t>if</a:t>
+                      </a:r>
+                      <a:r>
+                        <a:rPr lang="nl-NL" dirty="0"/>
+                        <a:t> </a:t>
+                      </a:r>
+                      <a:r>
+                        <a:rPr lang="nl-NL" dirty="0" err="1"/>
+                        <a:t>the</a:t>
+                      </a:r>
+                      <a:r>
+                        <a:rPr lang="nl-NL" dirty="0"/>
+                        <a:t> </a:t>
+                      </a:r>
+                      <a:r>
+                        <a:rPr lang="nl-NL" dirty="0" err="1"/>
+                        <a:t>month</a:t>
+                      </a:r>
+                      <a:r>
+                        <a:rPr lang="nl-NL" dirty="0"/>
+                        <a:t> was </a:t>
+                      </a:r>
+                      <a:r>
+                        <a:rPr lang="nl-NL" dirty="0" err="1"/>
+                        <a:t>normal</a:t>
+                      </a:r>
+                      <a:endParaRPr lang="nl-NL" dirty="0"/>
+                    </a:p>
+                  </a:txBody>
+                  <a:tcPr/>
+                </a:tc>
+                <a:tc>
+                  <a:txBody>
+                    <a:bodyPr/>
+                    <a:lstStyle/>
+                    <a:p>
+                      <a:r>
+                        <a:rPr lang="nl-NL" dirty="0"/>
+                        <a:t>€2161</a:t>
+                      </a:r>
+                    </a:p>
+                  </a:txBody>
+                  <a:tcPr/>
+                </a:tc>
+                <a:extLst>
+                  <a:ext uri="{0D108BD9-81ED-4DB2-BD59-A6C34878D82A}">
+                    <a16:rowId xmlns:a16="http://schemas.microsoft.com/office/drawing/2014/main" val="2388371369"/>
+                  </a:ext>
+                </a:extLst>
+              </a:tr>
+              <a:tr h="370840">
+                <a:tc>
+                  <a:txBody>
+                    <a:bodyPr/>
+                    <a:lstStyle/>
+                    <a:p>
+                      <a:r>
+                        <a:rPr lang="nl-NL" dirty="0"/>
+                        <a:t>Of </a:t>
+                      </a:r>
+                      <a:r>
+                        <a:rPr lang="nl-NL" dirty="0" err="1"/>
+                        <a:t>by</a:t>
+                      </a:r>
+                      <a:r>
+                        <a:rPr lang="nl-NL" dirty="0"/>
+                        <a:t> </a:t>
+                      </a:r>
+                    </a:p>
+                  </a:txBody>
+                  <a:tcPr/>
+                </a:tc>
+                <a:tc>
+                  <a:txBody>
+                    <a:bodyPr/>
+                    <a:lstStyle/>
+                    <a:p>
+                      <a:r>
+                        <a:rPr lang="nl-NL" dirty="0"/>
+                        <a:t>€75</a:t>
+                      </a:r>
+                    </a:p>
+                  </a:txBody>
+                  <a:tcPr/>
+                </a:tc>
+                <a:extLst>
+                  <a:ext uri="{0D108BD9-81ED-4DB2-BD59-A6C34878D82A}">
+                    <a16:rowId xmlns:a16="http://schemas.microsoft.com/office/drawing/2014/main" val="1204423508"/>
+                  </a:ext>
+                </a:extLst>
+              </a:tr>
+            </a:tbl>
+          </a:graphicData>
+        </a:graphic>
+      </p:graphicFrame>
+    </p:spTree>
+    <p:extLst>
+      <p:ext uri="{BB962C8B-B14F-4D97-AF65-F5344CB8AC3E}">
+        <p14:creationId xmlns:p14="http://schemas.microsoft.com/office/powerpoint/2010/main" val="2699811895"/>
+      </p:ext>
+    </p:extLst>
+  </p:cSld>
+  <p:clrMapOvr>
+    <a:masterClrMapping/>
+  </p:clrMapOvr>
+</p:sld>
+</file>
+
+<file path=ppt/slides/slide6.xml><?xml version="1.0" encoding="utf-8"?>
 <p:sld xmlns:a="http://schemas.openxmlformats.org/drawingml/2006/main" xmlns:r="http://schemas.openxmlformats.org/officeDocument/2006/relationships" xmlns:p="http://schemas.openxmlformats.org/presentationml/2006/main">
   <p:cSld>
     <p:spTree>

--- a/Personal_Finance_Analyzer_Presentation.pptx
+++ b/Personal_Finance_Analyzer_Presentation.pptx
@@ -8,9 +8,10 @@
     <p:sldId id="256" r:id="rId2"/>
     <p:sldId id="257" r:id="rId3"/>
     <p:sldId id="258" r:id="rId4"/>
-    <p:sldId id="259" r:id="rId5"/>
-    <p:sldId id="261" r:id="rId6"/>
-    <p:sldId id="260" r:id="rId7"/>
+    <p:sldId id="262" r:id="rId5"/>
+    <p:sldId id="259" r:id="rId6"/>
+    <p:sldId id="261" r:id="rId7"/>
+    <p:sldId id="260" r:id="rId8"/>
   </p:sldIdLst>
   <p:sldSz cx="12192000" cy="6858000"/>
   <p:notesSz cx="6858000" cy="9144000"/>
@@ -120,7 +121,7 @@
 <file path=ppt/revisionInfo.xml><?xml version="1.0" encoding="utf-8"?>
 <p1510:revInfo xmlns:a="http://schemas.openxmlformats.org/drawingml/2006/main" xmlns:r="http://schemas.openxmlformats.org/officeDocument/2006/relationships" xmlns:p1510="http://schemas.microsoft.com/office/powerpoint/2015/10/main">
   <p1510:revLst>
-    <p1510:client id="{A0BCF8D1-5CDF-4C8E-8EEC-72E339403B60}" v="3" dt="2026-01-12T12:48:10.834"/>
+    <p1510:client id="{A0BCF8D1-5CDF-4C8E-8EEC-72E339403B60}" v="9" dt="2026-01-13T14:23:20.904"/>
   </p1510:revLst>
 </p1510:revInfo>
 </file>
@@ -130,10 +131,25 @@
   <pc:docChgLst>
     <pc:chgData name="Jasper croijmans" userId="f86dc323274ef115" providerId="LiveId" clId="{6C9886B6-BF27-4343-B6DC-256FC21F34CE}"/>
     <pc:docChg chg="undo custSel addSld modSld">
-      <pc:chgData name="Jasper croijmans" userId="f86dc323274ef115" providerId="LiveId" clId="{6C9886B6-BF27-4343-B6DC-256FC21F34CE}" dt="2026-01-12T13:00:47.446" v="1111" actId="20577"/>
+      <pc:chgData name="Jasper croijmans" userId="f86dc323274ef115" providerId="LiveId" clId="{6C9886B6-BF27-4343-B6DC-256FC21F34CE}" dt="2026-01-13T14:23:43.827" v="1299" actId="114"/>
       <pc:docMkLst>
         <pc:docMk/>
       </pc:docMkLst>
+      <pc:sldChg chg="modSp mod">
+        <pc:chgData name="Jasper croijmans" userId="f86dc323274ef115" providerId="LiveId" clId="{6C9886B6-BF27-4343-B6DC-256FC21F34CE}" dt="2026-01-13T14:16:01.718" v="1136" actId="6549"/>
+        <pc:sldMkLst>
+          <pc:docMk/>
+          <pc:sldMk cId="2123390671" sldId="258"/>
+        </pc:sldMkLst>
+        <pc:spChg chg="mod">
+          <ac:chgData name="Jasper croijmans" userId="f86dc323274ef115" providerId="LiveId" clId="{6C9886B6-BF27-4343-B6DC-256FC21F34CE}" dt="2026-01-13T14:16:01.718" v="1136" actId="6549"/>
+          <ac:spMkLst>
+            <pc:docMk/>
+            <pc:sldMk cId="2123390671" sldId="258"/>
+            <ac:spMk id="4" creationId="{4FB25C94-E687-AC17-3887-E3630629E30C}"/>
+          </ac:spMkLst>
+        </pc:spChg>
+      </pc:sldChg>
       <pc:sldChg chg="addSp delSp modSp mod">
         <pc:chgData name="Jasper croijmans" userId="f86dc323274ef115" providerId="LiveId" clId="{6C9886B6-BF27-4343-B6DC-256FC21F34CE}" dt="2026-01-12T12:48:15.087" v="727" actId="20577"/>
         <pc:sldMkLst>
@@ -187,6 +203,45 @@
             <ac:graphicFrameMk id="4" creationId="{D79B46F8-860A-57F5-E960-FA4885911392}"/>
           </ac:graphicFrameMkLst>
         </pc:graphicFrameChg>
+      </pc:sldChg>
+      <pc:sldChg chg="addSp modSp new mod">
+        <pc:chgData name="Jasper croijmans" userId="f86dc323274ef115" providerId="LiveId" clId="{6C9886B6-BF27-4343-B6DC-256FC21F34CE}" dt="2026-01-13T14:23:43.827" v="1299" actId="114"/>
+        <pc:sldMkLst>
+          <pc:docMk/>
+          <pc:sldMk cId="3799357166" sldId="262"/>
+        </pc:sldMkLst>
+        <pc:spChg chg="mod">
+          <ac:chgData name="Jasper croijmans" userId="f86dc323274ef115" providerId="LiveId" clId="{6C9886B6-BF27-4343-B6DC-256FC21F34CE}" dt="2026-01-13T14:14:37.190" v="1119" actId="20577"/>
+          <ac:spMkLst>
+            <pc:docMk/>
+            <pc:sldMk cId="3799357166" sldId="262"/>
+            <ac:spMk id="2" creationId="{021B6A5F-56CE-AC64-980E-8CACF1E28D57}"/>
+          </ac:spMkLst>
+        </pc:spChg>
+        <pc:spChg chg="mod">
+          <ac:chgData name="Jasper croijmans" userId="f86dc323274ef115" providerId="LiveId" clId="{6C9886B6-BF27-4343-B6DC-256FC21F34CE}" dt="2026-01-13T14:20:20.728" v="1244" actId="14100"/>
+          <ac:spMkLst>
+            <pc:docMk/>
+            <pc:sldMk cId="3799357166" sldId="262"/>
+            <ac:spMk id="3" creationId="{93BB0054-1054-9335-59CF-3F64F8D4FCDC}"/>
+          </ac:spMkLst>
+        </pc:spChg>
+        <pc:spChg chg="add mod">
+          <ac:chgData name="Jasper croijmans" userId="f86dc323274ef115" providerId="LiveId" clId="{6C9886B6-BF27-4343-B6DC-256FC21F34CE}" dt="2026-01-13T14:21:42.082" v="1257" actId="1076"/>
+          <ac:spMkLst>
+            <pc:docMk/>
+            <pc:sldMk cId="3799357166" sldId="262"/>
+            <ac:spMk id="4" creationId="{748D82EB-F253-CC9B-7EDE-C97C41B9F477}"/>
+          </ac:spMkLst>
+        </pc:spChg>
+        <pc:spChg chg="add mod">
+          <ac:chgData name="Jasper croijmans" userId="f86dc323274ef115" providerId="LiveId" clId="{6C9886B6-BF27-4343-B6DC-256FC21F34CE}" dt="2026-01-13T14:23:43.827" v="1299" actId="114"/>
+          <ac:spMkLst>
+            <pc:docMk/>
+            <pc:sldMk cId="3799357166" sldId="262"/>
+            <ac:spMk id="5" creationId="{16653702-9EA8-C6AB-D770-B114DB647FDF}"/>
+          </ac:spMkLst>
+        </pc:spChg>
       </pc:sldChg>
     </pc:docChg>
   </pc:docChgLst>
@@ -344,7 +399,7 @@
           <a:p>
             <a:fld id="{11008460-8B2F-4AAA-A4E2-10730069204C}" type="datetimeFigureOut">
               <a:rPr lang="en-US" smtClean="0"/>
-              <a:t>1/12/2026</a:t>
+              <a:t>1/13/2026</a:t>
             </a:fld>
             <a:endParaRPr lang="en-US"/>
           </a:p>
@@ -2688,7 +2743,7 @@
           <a:p>
             <a:fld id="{11008460-8B2F-4AAA-A4E2-10730069204C}" type="datetimeFigureOut">
               <a:rPr lang="en-US" smtClean="0"/>
-              <a:t>1/12/2026</a:t>
+              <a:t>1/13/2026</a:t>
             </a:fld>
             <a:endParaRPr lang="en-US"/>
           </a:p>
@@ -5032,7 +5087,7 @@
           <a:p>
             <a:fld id="{11008460-8B2F-4AAA-A4E2-10730069204C}" type="datetimeFigureOut">
               <a:rPr lang="en-US" smtClean="0"/>
-              <a:t>1/12/2026</a:t>
+              <a:t>1/13/2026</a:t>
             </a:fld>
             <a:endParaRPr lang="en-US"/>
           </a:p>
@@ -5230,7 +5285,7 @@
           <a:p>
             <a:fld id="{11008460-8B2F-4AAA-A4E2-10730069204C}" type="datetimeFigureOut">
               <a:rPr lang="en-US" smtClean="0"/>
-              <a:t>1/12/2026</a:t>
+              <a:t>1/13/2026</a:t>
             </a:fld>
             <a:endParaRPr lang="en-US"/>
           </a:p>
@@ -5503,7 +5558,7 @@
           <a:p>
             <a:fld id="{11008460-8B2F-4AAA-A4E2-10730069204C}" type="datetimeFigureOut">
               <a:rPr lang="en-US" smtClean="0"/>
-              <a:t>1/12/2026</a:t>
+              <a:t>1/13/2026</a:t>
             </a:fld>
             <a:endParaRPr lang="en-US"/>
           </a:p>
@@ -5768,7 +5823,7 @@
           <a:p>
             <a:fld id="{11008460-8B2F-4AAA-A4E2-10730069204C}" type="datetimeFigureOut">
               <a:rPr lang="en-US" smtClean="0"/>
-              <a:t>1/12/2026</a:t>
+              <a:t>1/13/2026</a:t>
             </a:fld>
             <a:endParaRPr lang="en-US"/>
           </a:p>
@@ -6184,7 +6239,7 @@
           <a:p>
             <a:fld id="{11008460-8B2F-4AAA-A4E2-10730069204C}" type="datetimeFigureOut">
               <a:rPr lang="en-US" smtClean="0"/>
-              <a:t>1/12/2026</a:t>
+              <a:t>1/13/2026</a:t>
             </a:fld>
             <a:endParaRPr lang="en-US"/>
           </a:p>
@@ -6325,7 +6380,7 @@
           <a:p>
             <a:fld id="{11008460-8B2F-4AAA-A4E2-10730069204C}" type="datetimeFigureOut">
               <a:rPr lang="en-US" smtClean="0"/>
-              <a:t>1/12/2026</a:t>
+              <a:t>1/13/2026</a:t>
             </a:fld>
             <a:endParaRPr lang="en-US"/>
           </a:p>
@@ -6438,7 +6493,7 @@
           <a:p>
             <a:fld id="{11008460-8B2F-4AAA-A4E2-10730069204C}" type="datetimeFigureOut">
               <a:rPr lang="en-US" smtClean="0"/>
-              <a:t>1/12/2026</a:t>
+              <a:t>1/13/2026</a:t>
             </a:fld>
             <a:endParaRPr lang="en-US"/>
           </a:p>
@@ -6749,7 +6804,7 @@
           <a:p>
             <a:fld id="{11008460-8B2F-4AAA-A4E2-10730069204C}" type="datetimeFigureOut">
               <a:rPr lang="en-US" smtClean="0"/>
-              <a:t>1/12/2026</a:t>
+              <a:t>1/13/2026</a:t>
             </a:fld>
             <a:endParaRPr lang="en-US"/>
           </a:p>
@@ -7037,7 +7092,7 @@
           <a:p>
             <a:fld id="{11008460-8B2F-4AAA-A4E2-10730069204C}" type="datetimeFigureOut">
               <a:rPr lang="en-US" smtClean="0"/>
-              <a:t>1/12/2026</a:t>
+              <a:t>1/13/2026</a:t>
             </a:fld>
             <a:endParaRPr lang="en-US"/>
           </a:p>
@@ -9415,7 +9470,7 @@
             <a:fld id="{11008460-8B2F-4AAA-A4E2-10730069204C}" type="datetimeFigureOut">
               <a:rPr lang="en-US" smtClean="0"/>
               <a:pPr/>
-              <a:t>1/12/2026</a:t>
+              <a:t>1/13/2026</a:t>
             </a:fld>
             <a:endParaRPr lang="en-US" dirty="0"/>
           </a:p>
@@ -11362,7 +11417,23 @@
             </a:r>
             <a:r>
               <a:rPr lang="nl-NL" dirty="0"/>
+              <a:t> (</a:t>
+            </a:r>
+            <a:r>
+              <a:rPr lang="nl-NL" dirty="0" err="1"/>
+              <a:t>by</a:t>
+            </a:r>
+            <a:r>
+              <a:rPr lang="nl-NL" dirty="0"/>
               <a:t> </a:t>
+            </a:r>
+            <a:r>
+              <a:rPr lang="nl-NL" dirty="0" err="1"/>
+              <a:t>category</a:t>
+            </a:r>
+            <a:r>
+              <a:rPr lang="nl-NL" dirty="0"/>
+              <a:t>)</a:t>
             </a:r>
           </a:p>
           <a:p>
@@ -11488,6 +11559,312 @@
           <p:cNvPr id="2" name="Titel 1">
             <a:extLst>
               <a:ext uri="{FF2B5EF4-FFF2-40B4-BE49-F238E27FC236}">
+                <a16:creationId xmlns:a16="http://schemas.microsoft.com/office/drawing/2014/main" id="{021B6A5F-56CE-AC64-980E-8CACF1E28D57}"/>
+              </a:ext>
+            </a:extLst>
+          </p:cNvPr>
+          <p:cNvSpPr>
+            <a:spLocks noGrp="1"/>
+          </p:cNvSpPr>
+          <p:nvPr>
+            <p:ph type="title"/>
+          </p:nvPr>
+        </p:nvSpPr>
+        <p:spPr/>
+        <p:txBody>
+          <a:bodyPr/>
+          <a:lstStyle/>
+          <a:p>
+            <a:r>
+              <a:rPr lang="nl-NL" dirty="0" err="1"/>
+              <a:t>Feuture</a:t>
+            </a:r>
+            <a:endParaRPr lang="nl-NL" dirty="0"/>
+          </a:p>
+        </p:txBody>
+      </p:sp>
+      <p:sp>
+        <p:nvSpPr>
+          <p:cNvPr id="3" name="Tijdelijke aanduiding voor inhoud 2">
+            <a:extLst>
+              <a:ext uri="{FF2B5EF4-FFF2-40B4-BE49-F238E27FC236}">
+                <a16:creationId xmlns:a16="http://schemas.microsoft.com/office/drawing/2014/main" id="{93BB0054-1054-9335-59CF-3F64F8D4FCDC}"/>
+              </a:ext>
+            </a:extLst>
+          </p:cNvPr>
+          <p:cNvSpPr>
+            <a:spLocks noGrp="1"/>
+          </p:cNvSpPr>
+          <p:nvPr>
+            <p:ph idx="1"/>
+          </p:nvPr>
+        </p:nvSpPr>
+        <p:spPr>
+          <a:xfrm>
+            <a:off x="966744" y="2248257"/>
+            <a:ext cx="5532379" cy="1645317"/>
+          </a:xfrm>
+        </p:spPr>
+        <p:txBody>
+          <a:bodyPr/>
+          <a:lstStyle/>
+          <a:p>
+            <a:r>
+              <a:rPr lang="nl-NL" b="1" dirty="0" err="1"/>
+              <a:t>historical</a:t>
+            </a:r>
+            <a:r>
+              <a:rPr lang="nl-NL" b="1" dirty="0"/>
+              <a:t> </a:t>
+            </a:r>
+            <a:r>
+              <a:rPr lang="nl-NL" b="1" dirty="0" err="1"/>
+              <a:t>monthly</a:t>
+            </a:r>
+            <a:r>
+              <a:rPr lang="nl-NL" b="1" dirty="0"/>
+              <a:t> </a:t>
+            </a:r>
+            <a:r>
+              <a:rPr lang="nl-NL" b="1" dirty="0" err="1"/>
+              <a:t>spending</a:t>
+            </a:r>
+            <a:r>
+              <a:rPr lang="nl-NL" b="1" dirty="0"/>
+              <a:t> </a:t>
+            </a:r>
+            <a:r>
+              <a:rPr lang="nl-NL" b="1" dirty="0" err="1"/>
+              <a:t>patterns</a:t>
+            </a:r>
+            <a:endParaRPr lang="nl-NL" b="1" dirty="0"/>
+          </a:p>
+          <a:p>
+            <a:r>
+              <a:rPr lang="nl-NL" b="1" dirty="0"/>
+              <a:t>Primaire </a:t>
+            </a:r>
+            <a:r>
+              <a:rPr lang="nl-NL" b="1" dirty="0" err="1"/>
+              <a:t>feuture</a:t>
+            </a:r>
+            <a:r>
+              <a:rPr lang="nl-NL" b="1" dirty="0"/>
+              <a:t> is time (</a:t>
+            </a:r>
+            <a:r>
+              <a:rPr lang="nl-NL" b="1" dirty="0" err="1"/>
+              <a:t>the</a:t>
+            </a:r>
+            <a:r>
+              <a:rPr lang="nl-NL" b="1" dirty="0"/>
+              <a:t> </a:t>
+            </a:r>
+            <a:r>
+              <a:rPr lang="nl-NL" b="1" dirty="0" err="1"/>
+              <a:t>month</a:t>
+            </a:r>
+            <a:r>
+              <a:rPr lang="nl-NL" b="1" dirty="0"/>
+              <a:t> </a:t>
+            </a:r>
+            <a:r>
+              <a:rPr lang="nl-NL" b="1" dirty="0" err="1"/>
+              <a:t>number</a:t>
+            </a:r>
+            <a:r>
+              <a:rPr lang="nl-NL" b="1" dirty="0"/>
+              <a:t>)</a:t>
+            </a:r>
+          </a:p>
+          <a:p>
+            <a:r>
+              <a:rPr lang="nl-NL" b="1" dirty="0" err="1"/>
+              <a:t>Learns</a:t>
+            </a:r>
+            <a:r>
+              <a:rPr lang="nl-NL" b="1" dirty="0"/>
+              <a:t> </a:t>
+            </a:r>
+            <a:r>
+              <a:rPr lang="nl-NL" b="1" dirty="0" err="1"/>
+              <a:t>spending</a:t>
+            </a:r>
+            <a:r>
+              <a:rPr lang="nl-NL" b="1" dirty="0"/>
+              <a:t> over time per </a:t>
+            </a:r>
+            <a:r>
+              <a:rPr lang="nl-NL" b="1" dirty="0" err="1"/>
+              <a:t>category</a:t>
+            </a:r>
+            <a:endParaRPr lang="nl-NL" b="1" dirty="0"/>
+          </a:p>
+        </p:txBody>
+      </p:sp>
+      <p:sp>
+        <p:nvSpPr>
+          <p:cNvPr id="4" name="Tekstvak 3">
+            <a:extLst>
+              <a:ext uri="{FF2B5EF4-FFF2-40B4-BE49-F238E27FC236}">
+                <a16:creationId xmlns:a16="http://schemas.microsoft.com/office/drawing/2014/main" id="{748D82EB-F253-CC9B-7EDE-C97C41B9F477}"/>
+              </a:ext>
+            </a:extLst>
+          </p:cNvPr>
+          <p:cNvSpPr txBox="1"/>
+          <p:nvPr/>
+        </p:nvSpPr>
+        <p:spPr>
+          <a:xfrm>
+            <a:off x="884903" y="4041058"/>
+            <a:ext cx="3805084" cy="2308324"/>
+          </a:xfrm>
+          <a:prstGeom prst="rect">
+            <a:avLst/>
+          </a:prstGeom>
+          <a:noFill/>
+        </p:spPr>
+        <p:txBody>
+          <a:bodyPr wrap="square" rtlCol="0">
+            <a:spAutoFit/>
+          </a:bodyPr>
+          <a:lstStyle/>
+          <a:p>
+            <a:r>
+              <a:rPr lang="en-US" b="1" dirty="0"/>
+              <a:t>What the Model Does:</a:t>
+            </a:r>
+          </a:p>
+          <a:p>
+            <a:r>
+              <a:rPr lang="en-US" b="1" dirty="0"/>
+              <a:t>1. Aggregates</a:t>
+            </a:r>
+            <a:r>
+              <a:rPr lang="en-US" dirty="0"/>
+              <a:t> spending per month per category</a:t>
+            </a:r>
+          </a:p>
+          <a:p>
+            <a:r>
+              <a:rPr lang="en-US" b="1" dirty="0"/>
+              <a:t>2. Fits a line</a:t>
+            </a:r>
+            <a:r>
+              <a:rPr lang="en-US" dirty="0"/>
+              <a:t> through the data points (Linear Regression)</a:t>
+            </a:r>
+          </a:p>
+          <a:p>
+            <a:r>
+              <a:rPr lang="en-US" b="1" dirty="0"/>
+              <a:t>3. Extrapolates</a:t>
+            </a:r>
+            <a:r>
+              <a:rPr lang="en-US" dirty="0"/>
+              <a:t> the line to predict next month</a:t>
+            </a:r>
+          </a:p>
+          <a:p>
+            <a:endParaRPr lang="nl-NL" dirty="0"/>
+          </a:p>
+        </p:txBody>
+      </p:sp>
+      <p:sp>
+        <p:nvSpPr>
+          <p:cNvPr id="5" name="Tekstvak 4">
+            <a:extLst>
+              <a:ext uri="{FF2B5EF4-FFF2-40B4-BE49-F238E27FC236}">
+                <a16:creationId xmlns:a16="http://schemas.microsoft.com/office/drawing/2014/main" id="{16653702-9EA8-C6AB-D770-B114DB647FDF}"/>
+              </a:ext>
+            </a:extLst>
+          </p:cNvPr>
+          <p:cNvSpPr txBox="1"/>
+          <p:nvPr/>
+        </p:nvSpPr>
+        <p:spPr>
+          <a:xfrm>
+            <a:off x="5781368" y="4011561"/>
+            <a:ext cx="4463845" cy="2031325"/>
+          </a:xfrm>
+          <a:prstGeom prst="rect">
+            <a:avLst/>
+          </a:prstGeom>
+          <a:noFill/>
+        </p:spPr>
+        <p:txBody>
+          <a:bodyPr wrap="square" rtlCol="0">
+            <a:spAutoFit/>
+          </a:bodyPr>
+          <a:lstStyle/>
+          <a:p>
+            <a:r>
+              <a:rPr lang="en-US" b="1" dirty="0"/>
+              <a:t>Why This Simple Approach? </a:t>
+            </a:r>
+          </a:p>
+          <a:p>
+            <a:r>
+              <a:rPr lang="en-US" dirty="0"/>
+              <a:t>✓ Works well for short-term (1 month) forecasts </a:t>
+            </a:r>
+          </a:p>
+          <a:p>
+            <a:r>
+              <a:rPr lang="en-US" dirty="0"/>
+              <a:t>✓ Easy to interpret clear trend line </a:t>
+            </a:r>
+          </a:p>
+          <a:p>
+            <a:r>
+              <a:rPr lang="en-US" dirty="0"/>
+              <a:t>✓ Fast to train - minimal computation </a:t>
+            </a:r>
+          </a:p>
+          <a:p>
+            <a:r>
+              <a:rPr lang="en-US" dirty="0"/>
+              <a:t>⚠️ Assumption: Spending behavior remains relatively stable</a:t>
+            </a:r>
+            <a:endParaRPr lang="nl-NL" dirty="0"/>
+          </a:p>
+        </p:txBody>
+      </p:sp>
+    </p:spTree>
+    <p:extLst>
+      <p:ext uri="{BB962C8B-B14F-4D97-AF65-F5344CB8AC3E}">
+        <p14:creationId xmlns:p14="http://schemas.microsoft.com/office/powerpoint/2010/main" val="3799357166"/>
+      </p:ext>
+    </p:extLst>
+  </p:cSld>
+  <p:clrMapOvr>
+    <a:masterClrMapping/>
+  </p:clrMapOvr>
+</p:sld>
+</file>
+
+<file path=ppt/slides/slide5.xml><?xml version="1.0" encoding="utf-8"?>
+<p:sld xmlns:a="http://schemas.openxmlformats.org/drawingml/2006/main" xmlns:r="http://schemas.openxmlformats.org/officeDocument/2006/relationships" xmlns:p="http://schemas.openxmlformats.org/presentationml/2006/main">
+  <p:cSld>
+    <p:spTree>
+      <p:nvGrpSpPr>
+        <p:cNvPr id="1" name=""/>
+        <p:cNvGrpSpPr/>
+        <p:nvPr/>
+      </p:nvGrpSpPr>
+      <p:grpSpPr>
+        <a:xfrm>
+          <a:off x="0" y="0"/>
+          <a:ext cx="0" cy="0"/>
+          <a:chOff x="0" y="0"/>
+          <a:chExt cx="0" cy="0"/>
+        </a:xfrm>
+      </p:grpSpPr>
+      <p:sp>
+        <p:nvSpPr>
+          <p:cNvPr id="2" name="Titel 1">
+            <a:extLst>
+              <a:ext uri="{FF2B5EF4-FFF2-40B4-BE49-F238E27FC236}">
                 <a16:creationId xmlns:a16="http://schemas.microsoft.com/office/drawing/2014/main" id="{4C022A87-A106-0DC1-4600-3E8E016DC8C5}"/>
               </a:ext>
             </a:extLst>
@@ -11725,7 +12102,7 @@
 </p:sld>
 </file>
 
-<file path=ppt/slides/slide5.xml><?xml version="1.0" encoding="utf-8"?>
+<file path=ppt/slides/slide6.xml><?xml version="1.0" encoding="utf-8"?>
 <p:sld xmlns:a="http://schemas.openxmlformats.org/drawingml/2006/main" xmlns:r="http://schemas.openxmlformats.org/officeDocument/2006/relationships" xmlns:p="http://schemas.openxmlformats.org/presentationml/2006/main">
   <p:cSld>
     <p:spTree>
@@ -12211,7 +12588,7 @@
 </p:sld>
 </file>
 
-<file path=ppt/slides/slide6.xml><?xml version="1.0" encoding="utf-8"?>
+<file path=ppt/slides/slide7.xml><?xml version="1.0" encoding="utf-8"?>
 <p:sld xmlns:a="http://schemas.openxmlformats.org/drawingml/2006/main" xmlns:r="http://schemas.openxmlformats.org/officeDocument/2006/relationships" xmlns:p="http://schemas.openxmlformats.org/presentationml/2006/main">
   <p:cSld>
     <p:spTree>

--- a/Personal_Finance_Analyzer_Presentation.pptx
+++ b/Personal_Finance_Analyzer_Presentation.pptx
@@ -4,6 +4,9 @@
   <p:sldMasterIdLst>
     <p:sldMasterId id="2147483735" r:id="rId1"/>
   </p:sldMasterIdLst>
+  <p:notesMasterIdLst>
+    <p:notesMasterId r:id="rId9"/>
+  </p:notesMasterIdLst>
   <p:sldIdLst>
     <p:sldId id="256" r:id="rId2"/>
     <p:sldId id="257" r:id="rId3"/>
@@ -118,23 +121,30 @@
 </p:presentation>
 </file>
 
-<file path=ppt/revisionInfo.xml><?xml version="1.0" encoding="utf-8"?>
-<p1510:revInfo xmlns:a="http://schemas.openxmlformats.org/drawingml/2006/main" xmlns:r="http://schemas.openxmlformats.org/officeDocument/2006/relationships" xmlns:p1510="http://schemas.microsoft.com/office/powerpoint/2015/10/main">
-  <p1510:revLst>
-    <p1510:client id="{A0BCF8D1-5CDF-4C8E-8EEC-72E339403B60}" v="9" dt="2026-01-13T14:23:20.904"/>
-  </p1510:revLst>
-</p1510:revInfo>
-</file>
-
 <file path=ppt/changesInfos/changesInfo1.xml><?xml version="1.0" encoding="utf-8"?>
 <pc:chgInfo xmlns:a="http://schemas.openxmlformats.org/drawingml/2006/main" xmlns:r="http://schemas.openxmlformats.org/officeDocument/2006/relationships" xmlns:ac="http://schemas.microsoft.com/office/drawing/2013/main/command" xmlns:pc="http://schemas.microsoft.com/office/powerpoint/2013/main/command">
   <pc:docChgLst>
     <pc:chgData name="Jasper croijmans" userId="f86dc323274ef115" providerId="LiveId" clId="{6C9886B6-BF27-4343-B6DC-256FC21F34CE}"/>
     <pc:docChg chg="undo custSel addSld modSld">
-      <pc:chgData name="Jasper croijmans" userId="f86dc323274ef115" providerId="LiveId" clId="{6C9886B6-BF27-4343-B6DC-256FC21F34CE}" dt="2026-01-13T14:23:43.827" v="1299" actId="114"/>
+      <pc:chgData name="Jasper croijmans" userId="f86dc323274ef115" providerId="LiveId" clId="{6C9886B6-BF27-4343-B6DC-256FC21F34CE}" dt="2026-01-15T12:07:22.464" v="1303" actId="20577"/>
       <pc:docMkLst>
         <pc:docMk/>
       </pc:docMkLst>
+      <pc:sldChg chg="modSp mod">
+        <pc:chgData name="Jasper croijmans" userId="f86dc323274ef115" providerId="LiveId" clId="{6C9886B6-BF27-4343-B6DC-256FC21F34CE}" dt="2026-01-15T12:07:22.464" v="1303" actId="20577"/>
+        <pc:sldMkLst>
+          <pc:docMk/>
+          <pc:sldMk cId="498332765" sldId="257"/>
+        </pc:sldMkLst>
+        <pc:spChg chg="mod">
+          <ac:chgData name="Jasper croijmans" userId="f86dc323274ef115" providerId="LiveId" clId="{6C9886B6-BF27-4343-B6DC-256FC21F34CE}" dt="2026-01-15T12:07:22.464" v="1303" actId="20577"/>
+          <ac:spMkLst>
+            <pc:docMk/>
+            <pc:sldMk cId="498332765" sldId="257"/>
+            <ac:spMk id="2" creationId="{2DB97176-AC49-B79D-F055-3E4E5D07315C}"/>
+          </ac:spMkLst>
+        </pc:spChg>
+      </pc:sldChg>
       <pc:sldChg chg="modSp mod">
         <pc:chgData name="Jasper croijmans" userId="f86dc323274ef115" providerId="LiveId" clId="{6C9886B6-BF27-4343-B6DC-256FC21F34CE}" dt="2026-01-13T14:16:01.718" v="1136" actId="6549"/>
         <pc:sldMkLst>
@@ -162,14 +172,6 @@
             <pc:docMk/>
             <pc:sldMk cId="3130542668" sldId="259"/>
             <ac:spMk id="4" creationId="{17C9ECEF-0A35-305F-7C04-71A915591B36}"/>
-          </ac:spMkLst>
-        </pc:spChg>
-        <pc:spChg chg="add del mod">
-          <ac:chgData name="Jasper croijmans" userId="f86dc323274ef115" providerId="LiveId" clId="{6C9886B6-BF27-4343-B6DC-256FC21F34CE}" dt="2026-01-12T12:47:42.748" v="707"/>
-          <ac:spMkLst>
-            <pc:docMk/>
-            <pc:sldMk cId="3130542668" sldId="259"/>
-            <ac:spMk id="5" creationId="{F6589A1A-A4CD-9460-21F6-98B4FBCE0DCC}"/>
           </ac:spMkLst>
         </pc:spChg>
       </pc:sldChg>
@@ -248,6 +250,551 @@
 </pc:chgInfo>
 </file>
 
+<file path=ppt/notesMasters/notesMaster1.xml><?xml version="1.0" encoding="utf-8"?>
+<p:notesMaster xmlns:a="http://schemas.openxmlformats.org/drawingml/2006/main" xmlns:r="http://schemas.openxmlformats.org/officeDocument/2006/relationships" xmlns:p="http://schemas.openxmlformats.org/presentationml/2006/main">
+  <p:cSld>
+    <p:bg>
+      <p:bgRef idx="1001">
+        <a:schemeClr val="bg1"/>
+      </p:bgRef>
+    </p:bg>
+    <p:spTree>
+      <p:nvGrpSpPr>
+        <p:cNvPr id="1" name=""/>
+        <p:cNvGrpSpPr/>
+        <p:nvPr/>
+      </p:nvGrpSpPr>
+      <p:grpSpPr>
+        <a:xfrm>
+          <a:off x="0" y="0"/>
+          <a:ext cx="0" cy="0"/>
+          <a:chOff x="0" y="0"/>
+          <a:chExt cx="0" cy="0"/>
+        </a:xfrm>
+      </p:grpSpPr>
+      <p:sp>
+        <p:nvSpPr>
+          <p:cNvPr id="2" name="Tijdelijke aanduiding voor koptekst 1"/>
+          <p:cNvSpPr>
+            <a:spLocks noGrp="1"/>
+          </p:cNvSpPr>
+          <p:nvPr>
+            <p:ph type="hdr" sz="quarter"/>
+          </p:nvPr>
+        </p:nvSpPr>
+        <p:spPr>
+          <a:xfrm>
+            <a:off x="0" y="0"/>
+            <a:ext cx="2971800" cy="458788"/>
+          </a:xfrm>
+          <a:prstGeom prst="rect">
+            <a:avLst/>
+          </a:prstGeom>
+        </p:spPr>
+        <p:txBody>
+          <a:bodyPr vert="horz" lIns="91440" tIns="45720" rIns="91440" bIns="45720" rtlCol="0"/>
+          <a:lstStyle>
+            <a:lvl1pPr algn="l">
+              <a:defRPr sz="1200"/>
+            </a:lvl1pPr>
+          </a:lstStyle>
+          <a:p>
+            <a:endParaRPr lang="nl-NL"/>
+          </a:p>
+        </p:txBody>
+      </p:sp>
+      <p:sp>
+        <p:nvSpPr>
+          <p:cNvPr id="3" name="Tijdelijke aanduiding voor datum 2"/>
+          <p:cNvSpPr>
+            <a:spLocks noGrp="1"/>
+          </p:cNvSpPr>
+          <p:nvPr>
+            <p:ph type="dt" idx="1"/>
+          </p:nvPr>
+        </p:nvSpPr>
+        <p:spPr>
+          <a:xfrm>
+            <a:off x="3884613" y="0"/>
+            <a:ext cx="2971800" cy="458788"/>
+          </a:xfrm>
+          <a:prstGeom prst="rect">
+            <a:avLst/>
+          </a:prstGeom>
+        </p:spPr>
+        <p:txBody>
+          <a:bodyPr vert="horz" lIns="91440" tIns="45720" rIns="91440" bIns="45720" rtlCol="0"/>
+          <a:lstStyle>
+            <a:lvl1pPr algn="r">
+              <a:defRPr sz="1200"/>
+            </a:lvl1pPr>
+          </a:lstStyle>
+          <a:p>
+            <a:fld id="{AA4E3FCE-C998-418F-8335-0DE1AB8CC004}" type="datetimeFigureOut">
+              <a:rPr lang="nl-NL" smtClean="0"/>
+              <a:t>15-1-2026</a:t>
+            </a:fld>
+            <a:endParaRPr lang="nl-NL"/>
+          </a:p>
+        </p:txBody>
+      </p:sp>
+      <p:sp>
+        <p:nvSpPr>
+          <p:cNvPr id="4" name="Tijdelijke aanduiding voor dia-afbeelding 3"/>
+          <p:cNvSpPr>
+            <a:spLocks noGrp="1" noRot="1" noChangeAspect="1"/>
+          </p:cNvSpPr>
+          <p:nvPr>
+            <p:ph type="sldImg" idx="2"/>
+          </p:nvPr>
+        </p:nvSpPr>
+        <p:spPr>
+          <a:xfrm>
+            <a:off x="685800" y="1143000"/>
+            <a:ext cx="5486400" cy="3086100"/>
+          </a:xfrm>
+          <a:prstGeom prst="rect">
+            <a:avLst/>
+          </a:prstGeom>
+          <a:noFill/>
+          <a:ln w="12700">
+            <a:solidFill>
+              <a:prstClr val="black"/>
+            </a:solidFill>
+          </a:ln>
+        </p:spPr>
+        <p:txBody>
+          <a:bodyPr vert="horz" lIns="91440" tIns="45720" rIns="91440" bIns="45720" rtlCol="0" anchor="ctr"/>
+          <a:lstStyle/>
+          <a:p>
+            <a:endParaRPr lang="nl-NL"/>
+          </a:p>
+        </p:txBody>
+      </p:sp>
+      <p:sp>
+        <p:nvSpPr>
+          <p:cNvPr id="5" name="Tijdelijke aanduiding voor notities 4"/>
+          <p:cNvSpPr>
+            <a:spLocks noGrp="1"/>
+          </p:cNvSpPr>
+          <p:nvPr>
+            <p:ph type="body" sz="quarter" idx="3"/>
+          </p:nvPr>
+        </p:nvSpPr>
+        <p:spPr>
+          <a:xfrm>
+            <a:off x="685800" y="4400550"/>
+            <a:ext cx="5486400" cy="3600450"/>
+          </a:xfrm>
+          <a:prstGeom prst="rect">
+            <a:avLst/>
+          </a:prstGeom>
+        </p:spPr>
+        <p:txBody>
+          <a:bodyPr vert="horz" lIns="91440" tIns="45720" rIns="91440" bIns="45720" rtlCol="0"/>
+          <a:lstStyle/>
+          <a:p>
+            <a:pPr lvl="0"/>
+            <a:r>
+              <a:rPr lang="nl-NL"/>
+              <a:t>Klikken om de tekststijl van het model te bewerken</a:t>
+            </a:r>
+          </a:p>
+          <a:p>
+            <a:pPr lvl="1"/>
+            <a:r>
+              <a:rPr lang="nl-NL"/>
+              <a:t>Tweede niveau</a:t>
+            </a:r>
+          </a:p>
+          <a:p>
+            <a:pPr lvl="2"/>
+            <a:r>
+              <a:rPr lang="nl-NL"/>
+              <a:t>Derde niveau</a:t>
+            </a:r>
+          </a:p>
+          <a:p>
+            <a:pPr lvl="3"/>
+            <a:r>
+              <a:rPr lang="nl-NL"/>
+              <a:t>Vierde niveau</a:t>
+            </a:r>
+          </a:p>
+          <a:p>
+            <a:pPr lvl="4"/>
+            <a:r>
+              <a:rPr lang="nl-NL"/>
+              <a:t>Vijfde niveau</a:t>
+            </a:r>
+          </a:p>
+        </p:txBody>
+      </p:sp>
+      <p:sp>
+        <p:nvSpPr>
+          <p:cNvPr id="6" name="Tijdelijke aanduiding voor voettekst 5"/>
+          <p:cNvSpPr>
+            <a:spLocks noGrp="1"/>
+          </p:cNvSpPr>
+          <p:nvPr>
+            <p:ph type="ftr" sz="quarter" idx="4"/>
+          </p:nvPr>
+        </p:nvSpPr>
+        <p:spPr>
+          <a:xfrm>
+            <a:off x="0" y="8685213"/>
+            <a:ext cx="2971800" cy="458787"/>
+          </a:xfrm>
+          <a:prstGeom prst="rect">
+            <a:avLst/>
+          </a:prstGeom>
+        </p:spPr>
+        <p:txBody>
+          <a:bodyPr vert="horz" lIns="91440" tIns="45720" rIns="91440" bIns="45720" rtlCol="0" anchor="b"/>
+          <a:lstStyle>
+            <a:lvl1pPr algn="l">
+              <a:defRPr sz="1200"/>
+            </a:lvl1pPr>
+          </a:lstStyle>
+          <a:p>
+            <a:endParaRPr lang="nl-NL"/>
+          </a:p>
+        </p:txBody>
+      </p:sp>
+      <p:sp>
+        <p:nvSpPr>
+          <p:cNvPr id="7" name="Tijdelijke aanduiding voor dianummer 6"/>
+          <p:cNvSpPr>
+            <a:spLocks noGrp="1"/>
+          </p:cNvSpPr>
+          <p:nvPr>
+            <p:ph type="sldNum" sz="quarter" idx="5"/>
+          </p:nvPr>
+        </p:nvSpPr>
+        <p:spPr>
+          <a:xfrm>
+            <a:off x="3884613" y="8685213"/>
+            <a:ext cx="2971800" cy="458787"/>
+          </a:xfrm>
+          <a:prstGeom prst="rect">
+            <a:avLst/>
+          </a:prstGeom>
+        </p:spPr>
+        <p:txBody>
+          <a:bodyPr vert="horz" lIns="91440" tIns="45720" rIns="91440" bIns="45720" rtlCol="0" anchor="b"/>
+          <a:lstStyle>
+            <a:lvl1pPr algn="r">
+              <a:defRPr sz="1200"/>
+            </a:lvl1pPr>
+          </a:lstStyle>
+          <a:p>
+            <a:fld id="{A2BA24E3-B045-4E94-8B04-327D511E340B}" type="slidenum">
+              <a:rPr lang="nl-NL" smtClean="0"/>
+              <a:t>‹nr.›</a:t>
+            </a:fld>
+            <a:endParaRPr lang="nl-NL"/>
+          </a:p>
+        </p:txBody>
+      </p:sp>
+    </p:spTree>
+    <p:extLst>
+      <p:ext uri="{BB962C8B-B14F-4D97-AF65-F5344CB8AC3E}">
+        <p14:creationId xmlns:p14="http://schemas.microsoft.com/office/powerpoint/2010/main" val="1435779535"/>
+      </p:ext>
+    </p:extLst>
+  </p:cSld>
+  <p:clrMap bg1="lt1" tx1="dk1" bg2="lt2" tx2="dk2" accent1="accent1" accent2="accent2" accent3="accent3" accent4="accent4" accent5="accent5" accent6="accent6" hlink="hlink" folHlink="folHlink"/>
+  <p:notesStyle>
+    <a:lvl1pPr marL="0" algn="l" defTabSz="914400" rtl="0" eaLnBrk="1" latinLnBrk="0" hangingPunct="1">
+      <a:defRPr sz="1200" kern="1200">
+        <a:solidFill>
+          <a:schemeClr val="tx1"/>
+        </a:solidFill>
+        <a:latin typeface="+mn-lt"/>
+        <a:ea typeface="+mn-ea"/>
+        <a:cs typeface="+mn-cs"/>
+      </a:defRPr>
+    </a:lvl1pPr>
+    <a:lvl2pPr marL="457200" algn="l" defTabSz="914400" rtl="0" eaLnBrk="1" latinLnBrk="0" hangingPunct="1">
+      <a:defRPr sz="1200" kern="1200">
+        <a:solidFill>
+          <a:schemeClr val="tx1"/>
+        </a:solidFill>
+        <a:latin typeface="+mn-lt"/>
+        <a:ea typeface="+mn-ea"/>
+        <a:cs typeface="+mn-cs"/>
+      </a:defRPr>
+    </a:lvl2pPr>
+    <a:lvl3pPr marL="914400" algn="l" defTabSz="914400" rtl="0" eaLnBrk="1" latinLnBrk="0" hangingPunct="1">
+      <a:defRPr sz="1200" kern="1200">
+        <a:solidFill>
+          <a:schemeClr val="tx1"/>
+        </a:solidFill>
+        <a:latin typeface="+mn-lt"/>
+        <a:ea typeface="+mn-ea"/>
+        <a:cs typeface="+mn-cs"/>
+      </a:defRPr>
+    </a:lvl3pPr>
+    <a:lvl4pPr marL="1371600" algn="l" defTabSz="914400" rtl="0" eaLnBrk="1" latinLnBrk="0" hangingPunct="1">
+      <a:defRPr sz="1200" kern="1200">
+        <a:solidFill>
+          <a:schemeClr val="tx1"/>
+        </a:solidFill>
+        <a:latin typeface="+mn-lt"/>
+        <a:ea typeface="+mn-ea"/>
+        <a:cs typeface="+mn-cs"/>
+      </a:defRPr>
+    </a:lvl4pPr>
+    <a:lvl5pPr marL="1828800" algn="l" defTabSz="914400" rtl="0" eaLnBrk="1" latinLnBrk="0" hangingPunct="1">
+      <a:defRPr sz="1200" kern="1200">
+        <a:solidFill>
+          <a:schemeClr val="tx1"/>
+        </a:solidFill>
+        <a:latin typeface="+mn-lt"/>
+        <a:ea typeface="+mn-ea"/>
+        <a:cs typeface="+mn-cs"/>
+      </a:defRPr>
+    </a:lvl5pPr>
+    <a:lvl6pPr marL="2286000" algn="l" defTabSz="914400" rtl="0" eaLnBrk="1" latinLnBrk="0" hangingPunct="1">
+      <a:defRPr sz="1200" kern="1200">
+        <a:solidFill>
+          <a:schemeClr val="tx1"/>
+        </a:solidFill>
+        <a:latin typeface="+mn-lt"/>
+        <a:ea typeface="+mn-ea"/>
+        <a:cs typeface="+mn-cs"/>
+      </a:defRPr>
+    </a:lvl6pPr>
+    <a:lvl7pPr marL="2743200" algn="l" defTabSz="914400" rtl="0" eaLnBrk="1" latinLnBrk="0" hangingPunct="1">
+      <a:defRPr sz="1200" kern="1200">
+        <a:solidFill>
+          <a:schemeClr val="tx1"/>
+        </a:solidFill>
+        <a:latin typeface="+mn-lt"/>
+        <a:ea typeface="+mn-ea"/>
+        <a:cs typeface="+mn-cs"/>
+      </a:defRPr>
+    </a:lvl7pPr>
+    <a:lvl8pPr marL="3200400" algn="l" defTabSz="914400" rtl="0" eaLnBrk="1" latinLnBrk="0" hangingPunct="1">
+      <a:defRPr sz="1200" kern="1200">
+        <a:solidFill>
+          <a:schemeClr val="tx1"/>
+        </a:solidFill>
+        <a:latin typeface="+mn-lt"/>
+        <a:ea typeface="+mn-ea"/>
+        <a:cs typeface="+mn-cs"/>
+      </a:defRPr>
+    </a:lvl8pPr>
+    <a:lvl9pPr marL="3657600" algn="l" defTabSz="914400" rtl="0" eaLnBrk="1" latinLnBrk="0" hangingPunct="1">
+      <a:defRPr sz="1200" kern="1200">
+        <a:solidFill>
+          <a:schemeClr val="tx1"/>
+        </a:solidFill>
+        <a:latin typeface="+mn-lt"/>
+        <a:ea typeface="+mn-ea"/>
+        <a:cs typeface="+mn-cs"/>
+      </a:defRPr>
+    </a:lvl9pPr>
+  </p:notesStyle>
+</p:notesMaster>
+</file>
+
+<file path=ppt/notesSlides/notesSlide1.xml><?xml version="1.0" encoding="utf-8"?>
+<p:notes xmlns:a="http://schemas.openxmlformats.org/drawingml/2006/main" xmlns:r="http://schemas.openxmlformats.org/officeDocument/2006/relationships" xmlns:p="http://schemas.openxmlformats.org/presentationml/2006/main">
+  <p:cSld>
+    <p:spTree>
+      <p:nvGrpSpPr>
+        <p:cNvPr id="1" name=""/>
+        <p:cNvGrpSpPr/>
+        <p:nvPr/>
+      </p:nvGrpSpPr>
+      <p:grpSpPr>
+        <a:xfrm>
+          <a:off x="0" y="0"/>
+          <a:ext cx="0" cy="0"/>
+          <a:chOff x="0" y="0"/>
+          <a:chExt cx="0" cy="0"/>
+        </a:xfrm>
+      </p:grpSpPr>
+      <p:sp>
+        <p:nvSpPr>
+          <p:cNvPr id="2" name="Tijdelijke aanduiding voor dia-afbeelding 1"/>
+          <p:cNvSpPr>
+            <a:spLocks noGrp="1" noRot="1" noChangeAspect="1"/>
+          </p:cNvSpPr>
+          <p:nvPr>
+            <p:ph type="sldImg"/>
+          </p:nvPr>
+        </p:nvSpPr>
+        <p:spPr/>
+      </p:sp>
+      <p:sp>
+        <p:nvSpPr>
+          <p:cNvPr id="3" name="Tijdelijke aanduiding voor notities 2"/>
+          <p:cNvSpPr>
+            <a:spLocks noGrp="1"/>
+          </p:cNvSpPr>
+          <p:nvPr>
+            <p:ph type="body" idx="1"/>
+          </p:nvPr>
+        </p:nvSpPr>
+        <p:spPr/>
+        <p:txBody>
+          <a:bodyPr/>
+          <a:lstStyle/>
+          <a:p>
+            <a:r>
+              <a:rPr lang="en-US" dirty="0"/>
+              <a:t>" performed extensive </a:t>
+            </a:r>
+            <a:r>
+              <a:rPr lang="en-US" b="1" dirty="0"/>
+              <a:t>feature engineering</a:t>
+            </a:r>
+            <a:r>
+              <a:rPr lang="en-US" dirty="0"/>
+              <a:t>, transforming the basic 4 columns from the bank CSV into over 30 useful features. For example, from a simple date, I extracted day of week, weekend indicator, quarter, and more. This rich feature set enables the machine learning models to identify patterns and make accurate predictions</a:t>
+            </a:r>
+          </a:p>
+          <a:p>
+            <a:endParaRPr lang="en-US" dirty="0"/>
+          </a:p>
+          <a:p>
+            <a:r>
+              <a:rPr lang="en-US" dirty="0"/>
+              <a:t>The </a:t>
+            </a:r>
+            <a:r>
+              <a:rPr lang="en-US" b="1" dirty="0"/>
+              <a:t>72% accuracy</a:t>
+            </a:r>
+            <a:r>
+              <a:rPr lang="en-US" dirty="0"/>
+              <a:t> refers specifically to the ML model's performance on transactions that don't have obvious keywords. However, in practice:</a:t>
+            </a:r>
+          </a:p>
+          <a:p>
+            <a:r>
+              <a:rPr lang="en-US" dirty="0"/>
+              <a:t>Most transactions (~80-90%) are categorized via </a:t>
+            </a:r>
+            <a:r>
+              <a:rPr lang="en-US" b="1" dirty="0"/>
+              <a:t>keywords</a:t>
+            </a:r>
+            <a:r>
+              <a:rPr lang="en-US" dirty="0"/>
+              <a:t> which are essentially 100% accurate</a:t>
+            </a:r>
+          </a:p>
+          <a:p>
+            <a:r>
+              <a:rPr lang="en-US" dirty="0"/>
+              <a:t>The remaining transactions use the </a:t>
+            </a:r>
+            <a:r>
+              <a:rPr lang="en-US" b="1" dirty="0"/>
+              <a:t>ML model</a:t>
+            </a:r>
+            <a:r>
+              <a:rPr lang="en-US" dirty="0"/>
+              <a:t> with 72% accuracy and </a:t>
+            </a:r>
+            <a:r>
+              <a:rPr lang="en-US" b="1" dirty="0"/>
+              <a:t>82.6% confidence scores</a:t>
+            </a:r>
+            <a:endParaRPr lang="en-US" dirty="0"/>
+          </a:p>
+          <a:p>
+            <a:r>
+              <a:rPr lang="en-US" dirty="0"/>
+              <a:t>For the 28% that might be miscategorized:</a:t>
+            </a:r>
+          </a:p>
+          <a:p>
+            <a:r>
+              <a:rPr lang="en-US" dirty="0"/>
+              <a:t>The system provides </a:t>
+            </a:r>
+            <a:r>
+              <a:rPr lang="en-US" b="1" dirty="0"/>
+              <a:t>confidence scores</a:t>
+            </a:r>
+            <a:r>
+              <a:rPr lang="en-US" dirty="0"/>
+              <a:t> - low confidence flags can be reviewed</a:t>
+            </a:r>
+          </a:p>
+          <a:p>
+            <a:r>
+              <a:rPr lang="en-US" dirty="0"/>
+              <a:t>Users can </a:t>
+            </a:r>
+            <a:r>
+              <a:rPr lang="en-US" b="1" dirty="0"/>
+              <a:t>manually correct</a:t>
+            </a:r>
+            <a:r>
+              <a:rPr lang="en-US" dirty="0"/>
+              <a:t> categories, which improves the model over time</a:t>
+            </a:r>
+          </a:p>
+          <a:p>
+            <a:r>
+              <a:rPr lang="en-US"/>
+              <a:t>The </a:t>
+            </a:r>
+            <a:r>
+              <a:rPr lang="en-US" b="1"/>
+              <a:t>anomaly detection</a:t>
+            </a:r>
+            <a:r>
+              <a:rPr lang="en-US"/>
+              <a:t> system helps catch unusual categorizations</a:t>
+            </a:r>
+          </a:p>
+          <a:p>
+            <a:endParaRPr lang="nl-NL" dirty="0"/>
+          </a:p>
+        </p:txBody>
+      </p:sp>
+      <p:sp>
+        <p:nvSpPr>
+          <p:cNvPr id="4" name="Tijdelijke aanduiding voor dianummer 3"/>
+          <p:cNvSpPr>
+            <a:spLocks noGrp="1"/>
+          </p:cNvSpPr>
+          <p:nvPr>
+            <p:ph type="sldNum" sz="quarter" idx="5"/>
+          </p:nvPr>
+        </p:nvSpPr>
+        <p:spPr/>
+        <p:txBody>
+          <a:bodyPr/>
+          <a:lstStyle/>
+          <a:p>
+            <a:fld id="{A2BA24E3-B045-4E94-8B04-327D511E340B}" type="slidenum">
+              <a:rPr lang="nl-NL" smtClean="0"/>
+              <a:t>3</a:t>
+            </a:fld>
+            <a:endParaRPr lang="nl-NL"/>
+          </a:p>
+        </p:txBody>
+      </p:sp>
+    </p:spTree>
+    <p:extLst>
+      <p:ext uri="{BB962C8B-B14F-4D97-AF65-F5344CB8AC3E}">
+        <p14:creationId xmlns:p14="http://schemas.microsoft.com/office/powerpoint/2010/main" val="2990671458"/>
+      </p:ext>
+    </p:extLst>
+  </p:cSld>
+  <p:clrMapOvr>
+    <a:masterClrMapping/>
+  </p:clrMapOvr>
+</p:notes>
+</file>
+
 <file path=ppt/slideLayouts/slideLayout1.xml><?xml version="1.0" encoding="utf-8"?>
 <p:sldLayout xmlns:a="http://schemas.openxmlformats.org/drawingml/2006/main" xmlns:r="http://schemas.openxmlformats.org/officeDocument/2006/relationships" xmlns:p="http://schemas.openxmlformats.org/presentationml/2006/main" type="title" preserve="1">
   <p:cSld name="Title Slide">
@@ -399,7 +946,7 @@
           <a:p>
             <a:fld id="{11008460-8B2F-4AAA-A4E2-10730069204C}" type="datetimeFigureOut">
               <a:rPr lang="en-US" smtClean="0"/>
-              <a:t>1/13/2026</a:t>
+              <a:t>1/15/2026</a:t>
             </a:fld>
             <a:endParaRPr lang="en-US"/>
           </a:p>
@@ -2743,7 +3290,7 @@
           <a:p>
             <a:fld id="{11008460-8B2F-4AAA-A4E2-10730069204C}" type="datetimeFigureOut">
               <a:rPr lang="en-US" smtClean="0"/>
-              <a:t>1/13/2026</a:t>
+              <a:t>1/15/2026</a:t>
             </a:fld>
             <a:endParaRPr lang="en-US"/>
           </a:p>
@@ -5087,7 +5634,7 @@
           <a:p>
             <a:fld id="{11008460-8B2F-4AAA-A4E2-10730069204C}" type="datetimeFigureOut">
               <a:rPr lang="en-US" smtClean="0"/>
-              <a:t>1/13/2026</a:t>
+              <a:t>1/15/2026</a:t>
             </a:fld>
             <a:endParaRPr lang="en-US"/>
           </a:p>
@@ -5285,7 +5832,7 @@
           <a:p>
             <a:fld id="{11008460-8B2F-4AAA-A4E2-10730069204C}" type="datetimeFigureOut">
               <a:rPr lang="en-US" smtClean="0"/>
-              <a:t>1/13/2026</a:t>
+              <a:t>1/15/2026</a:t>
             </a:fld>
             <a:endParaRPr lang="en-US"/>
           </a:p>
@@ -5558,7 +6105,7 @@
           <a:p>
             <a:fld id="{11008460-8B2F-4AAA-A4E2-10730069204C}" type="datetimeFigureOut">
               <a:rPr lang="en-US" smtClean="0"/>
-              <a:t>1/13/2026</a:t>
+              <a:t>1/15/2026</a:t>
             </a:fld>
             <a:endParaRPr lang="en-US"/>
           </a:p>
@@ -5823,7 +6370,7 @@
           <a:p>
             <a:fld id="{11008460-8B2F-4AAA-A4E2-10730069204C}" type="datetimeFigureOut">
               <a:rPr lang="en-US" smtClean="0"/>
-              <a:t>1/13/2026</a:t>
+              <a:t>1/15/2026</a:t>
             </a:fld>
             <a:endParaRPr lang="en-US"/>
           </a:p>
@@ -6239,7 +6786,7 @@
           <a:p>
             <a:fld id="{11008460-8B2F-4AAA-A4E2-10730069204C}" type="datetimeFigureOut">
               <a:rPr lang="en-US" smtClean="0"/>
-              <a:t>1/13/2026</a:t>
+              <a:t>1/15/2026</a:t>
             </a:fld>
             <a:endParaRPr lang="en-US"/>
           </a:p>
@@ -6380,7 +6927,7 @@
           <a:p>
             <a:fld id="{11008460-8B2F-4AAA-A4E2-10730069204C}" type="datetimeFigureOut">
               <a:rPr lang="en-US" smtClean="0"/>
-              <a:t>1/13/2026</a:t>
+              <a:t>1/15/2026</a:t>
             </a:fld>
             <a:endParaRPr lang="en-US"/>
           </a:p>
@@ -6493,7 +7040,7 @@
           <a:p>
             <a:fld id="{11008460-8B2F-4AAA-A4E2-10730069204C}" type="datetimeFigureOut">
               <a:rPr lang="en-US" smtClean="0"/>
-              <a:t>1/13/2026</a:t>
+              <a:t>1/15/2026</a:t>
             </a:fld>
             <a:endParaRPr lang="en-US"/>
           </a:p>
@@ -6804,7 +7351,7 @@
           <a:p>
             <a:fld id="{11008460-8B2F-4AAA-A4E2-10730069204C}" type="datetimeFigureOut">
               <a:rPr lang="en-US" smtClean="0"/>
-              <a:t>1/13/2026</a:t>
+              <a:t>1/15/2026</a:t>
             </a:fld>
             <a:endParaRPr lang="en-US"/>
           </a:p>
@@ -7092,7 +7639,7 @@
           <a:p>
             <a:fld id="{11008460-8B2F-4AAA-A4E2-10730069204C}" type="datetimeFigureOut">
               <a:rPr lang="en-US" smtClean="0"/>
-              <a:t>1/13/2026</a:t>
+              <a:t>1/15/2026</a:t>
             </a:fld>
             <a:endParaRPr lang="en-US"/>
           </a:p>
@@ -9470,7 +10017,7 @@
             <a:fld id="{11008460-8B2F-4AAA-A4E2-10730069204C}" type="datetimeFigureOut">
               <a:rPr lang="en-US" smtClean="0"/>
               <a:pPr/>
-              <a:t>1/13/2026</a:t>
+              <a:t>1/15/2026</a:t>
             </a:fld>
             <a:endParaRPr lang="en-US" dirty="0"/>
           </a:p>
@@ -10710,9 +11257,10 @@
               <a:t>Problem</a:t>
             </a:r>
             <a:r>
-              <a:rPr lang="nl-NL" dirty="0"/>
-              <a:t> solution</a:t>
-            </a:r>
+              <a:rPr lang="nl-NL"/>
+              <a:t>/Solution</a:t>
+            </a:r>
+            <a:endParaRPr lang="nl-NL" dirty="0"/>
           </a:p>
         </p:txBody>
       </p:sp>
@@ -11255,7 +11803,9 @@
           </a:xfrm>
         </p:spPr>
         <p:txBody>
-          <a:bodyPr/>
+          <a:bodyPr>
+            <a:normAutofit/>
+          </a:bodyPr>
           <a:lstStyle/>
           <a:p>
             <a:pPr marL="0" indent="0">
@@ -11579,6 +12129,30 @@
               <a:rPr lang="nl-NL" dirty="0" err="1"/>
               <a:t>Feuture</a:t>
             </a:r>
+            <a:r>
+              <a:rPr lang="nl-NL" dirty="0"/>
+              <a:t> </a:t>
+            </a:r>
+            <a:r>
+              <a:rPr lang="nl-NL" dirty="0" err="1"/>
+              <a:t>for</a:t>
+            </a:r>
+            <a:r>
+              <a:rPr lang="nl-NL" dirty="0"/>
+              <a:t> </a:t>
+            </a:r>
+            <a:r>
+              <a:rPr lang="nl-NL" dirty="0" err="1"/>
+              <a:t>linear</a:t>
+            </a:r>
+            <a:r>
+              <a:rPr lang="nl-NL" dirty="0"/>
+              <a:t> </a:t>
+            </a:r>
+            <a:r>
+              <a:rPr lang="nl-NL" dirty="0" err="1"/>
+              <a:t>regression</a:t>
+            </a:r>
             <a:endParaRPr lang="nl-NL" dirty="0"/>
           </a:p>
         </p:txBody>
@@ -11610,37 +12184,6 @@
           <a:lstStyle/>
           <a:p>
             <a:r>
-              <a:rPr lang="nl-NL" b="1" dirty="0" err="1"/>
-              <a:t>historical</a:t>
-            </a:r>
-            <a:r>
-              <a:rPr lang="nl-NL" b="1" dirty="0"/>
-              <a:t> </a:t>
-            </a:r>
-            <a:r>
-              <a:rPr lang="nl-NL" b="1" dirty="0" err="1"/>
-              <a:t>monthly</a:t>
-            </a:r>
-            <a:r>
-              <a:rPr lang="nl-NL" b="1" dirty="0"/>
-              <a:t> </a:t>
-            </a:r>
-            <a:r>
-              <a:rPr lang="nl-NL" b="1" dirty="0" err="1"/>
-              <a:t>spending</a:t>
-            </a:r>
-            <a:r>
-              <a:rPr lang="nl-NL" b="1" dirty="0"/>
-              <a:t> </a:t>
-            </a:r>
-            <a:r>
-              <a:rPr lang="nl-NL" b="1" dirty="0" err="1"/>
-              <a:t>patterns</a:t>
-            </a:r>
-            <a:endParaRPr lang="nl-NL" b="1" dirty="0"/>
-          </a:p>
-          <a:p>
-            <a:r>
               <a:rPr lang="nl-NL" b="1" dirty="0"/>
               <a:t>Primaire </a:t>
             </a:r>
@@ -11654,23 +12197,7 @@
             </a:r>
             <a:r>
               <a:rPr lang="nl-NL" b="1" dirty="0" err="1"/>
-              <a:t>the</a:t>
-            </a:r>
-            <a:r>
-              <a:rPr lang="nl-NL" b="1" dirty="0"/>
-              <a:t> </a:t>
-            </a:r>
-            <a:r>
-              <a:rPr lang="nl-NL" b="1" dirty="0" err="1"/>
               <a:t>month</a:t>
-            </a:r>
-            <a:r>
-              <a:rPr lang="nl-NL" b="1" dirty="0"/>
-              <a:t> </a:t>
-            </a:r>
-            <a:r>
-              <a:rPr lang="nl-NL" b="1" dirty="0" err="1"/>
-              <a:t>number</a:t>
             </a:r>
             <a:r>
               <a:rPr lang="nl-NL" b="1" dirty="0"/>
@@ -12972,7 +13499,7 @@
           <a:p>
             <a:r>
               <a:rPr lang="en-US" sz="2000" dirty="0"/>
-              <a:t>• Mobile app </a:t>
+              <a:t>• Mobile app</a:t>
             </a:r>
           </a:p>
           <a:p>
@@ -13243,4 +13770,319 @@
     </a:ext>
   </a:extLst>
 </a:theme>
+</file>
+
+<file path=ppt/theme/theme2.xml><?xml version="1.0" encoding="utf-8"?>
+<a:theme xmlns:a="http://schemas.openxmlformats.org/drawingml/2006/main" name="Kantoorthema">
+  <a:themeElements>
+    <a:clrScheme name="Office">
+      <a:dk1>
+        <a:sysClr val="windowText" lastClr="000000"/>
+      </a:dk1>
+      <a:lt1>
+        <a:sysClr val="window" lastClr="FFFFFF"/>
+      </a:lt1>
+      <a:dk2>
+        <a:srgbClr val="0E2841"/>
+      </a:dk2>
+      <a:lt2>
+        <a:srgbClr val="E8E8E8"/>
+      </a:lt2>
+      <a:accent1>
+        <a:srgbClr val="156082"/>
+      </a:accent1>
+      <a:accent2>
+        <a:srgbClr val="E97132"/>
+      </a:accent2>
+      <a:accent3>
+        <a:srgbClr val="196B24"/>
+      </a:accent3>
+      <a:accent4>
+        <a:srgbClr val="0F9ED5"/>
+      </a:accent4>
+      <a:accent5>
+        <a:srgbClr val="A02B93"/>
+      </a:accent5>
+      <a:accent6>
+        <a:srgbClr val="4EA72E"/>
+      </a:accent6>
+      <a:hlink>
+        <a:srgbClr val="467886"/>
+      </a:hlink>
+      <a:folHlink>
+        <a:srgbClr val="96607D"/>
+      </a:folHlink>
+    </a:clrScheme>
+    <a:fontScheme name="Office">
+      <a:majorFont>
+        <a:latin typeface="Aptos Display" panose="02110004020202020204"/>
+        <a:ea typeface=""/>
+        <a:cs typeface=""/>
+        <a:font script="Jpan" typeface="游ゴシック Light"/>
+        <a:font script="Hang" typeface="맑은 고딕"/>
+        <a:font script="Hans" typeface="等线 Light"/>
+        <a:font script="Hant" typeface="新細明體"/>
+        <a:font script="Arab" typeface="Times New Roman"/>
+        <a:font script="Hebr" typeface="Times New Roman"/>
+        <a:font script="Thai" typeface="Angsana New"/>
+        <a:font script="Ethi" typeface="Nyala"/>
+        <a:font script="Beng" typeface="Vrinda"/>
+        <a:font script="Gujr" typeface="Shruti"/>
+        <a:font script="Khmr" typeface="MoolBoran"/>
+        <a:font script="Knda" typeface="Tunga"/>
+        <a:font script="Guru" typeface="Raavi"/>
+        <a:font script="Cans" typeface="Euphemia"/>
+        <a:font script="Cher" typeface="Plantagenet Cherokee"/>
+        <a:font script="Yiii" typeface="Microsoft Yi Baiti"/>
+        <a:font script="Tibt" typeface="Microsoft Himalaya"/>
+        <a:font script="Thaa" typeface="MV Boli"/>
+        <a:font script="Deva" typeface="Mangal"/>
+        <a:font script="Telu" typeface="Gautami"/>
+        <a:font script="Taml" typeface="Latha"/>
+        <a:font script="Syrc" typeface="Estrangelo Edessa"/>
+        <a:font script="Orya" typeface="Kalinga"/>
+        <a:font script="Mlym" typeface="Kartika"/>
+        <a:font script="Laoo" typeface="DokChampa"/>
+        <a:font script="Sinh" typeface="Iskoola Pota"/>
+        <a:font script="Mong" typeface="Mongolian Baiti"/>
+        <a:font script="Viet" typeface="Times New Roman"/>
+        <a:font script="Uigh" typeface="Microsoft Uighur"/>
+        <a:font script="Geor" typeface="Sylfaen"/>
+        <a:font script="Armn" typeface="Arial"/>
+        <a:font script="Bugi" typeface="Leelawadee UI"/>
+        <a:font script="Bopo" typeface="Microsoft JhengHei"/>
+        <a:font script="Java" typeface="Javanese Text"/>
+        <a:font script="Lisu" typeface="Segoe UI"/>
+        <a:font script="Mymr" typeface="Myanmar Text"/>
+        <a:font script="Nkoo" typeface="Ebrima"/>
+        <a:font script="Olck" typeface="Nirmala UI"/>
+        <a:font script="Osma" typeface="Ebrima"/>
+        <a:font script="Phag" typeface="Phagspa"/>
+        <a:font script="Syrn" typeface="Estrangelo Edessa"/>
+        <a:font script="Syrj" typeface="Estrangelo Edessa"/>
+        <a:font script="Syre" typeface="Estrangelo Edessa"/>
+        <a:font script="Sora" typeface="Nirmala UI"/>
+        <a:font script="Tale" typeface="Microsoft Tai Le"/>
+        <a:font script="Talu" typeface="Microsoft New Tai Lue"/>
+        <a:font script="Tfng" typeface="Ebrima"/>
+      </a:majorFont>
+      <a:minorFont>
+        <a:latin typeface="Aptos" panose="02110004020202020204"/>
+        <a:ea typeface=""/>
+        <a:cs typeface=""/>
+        <a:font script="Jpan" typeface="游ゴシック"/>
+        <a:font script="Hang" typeface="맑은 고딕"/>
+        <a:font script="Hans" typeface="等线"/>
+        <a:font script="Hant" typeface="新細明體"/>
+        <a:font script="Arab" typeface="Arial"/>
+        <a:font script="Hebr" typeface="Arial"/>
+        <a:font script="Thai" typeface="Cordia New"/>
+        <a:font script="Ethi" typeface="Nyala"/>
+        <a:font script="Beng" typeface="Vrinda"/>
+        <a:font script="Gujr" typeface="Shruti"/>
+        <a:font script="Khmr" typeface="DaunPenh"/>
+        <a:font script="Knda" typeface="Tunga"/>
+        <a:font script="Guru" typeface="Raavi"/>
+        <a:font script="Cans" typeface="Euphemia"/>
+        <a:font script="Cher" typeface="Plantagenet Cherokee"/>
+        <a:font script="Yiii" typeface="Microsoft Yi Baiti"/>
+        <a:font script="Tibt" typeface="Microsoft Himalaya"/>
+        <a:font script="Thaa" typeface="MV Boli"/>
+        <a:font script="Deva" typeface="Mangal"/>
+        <a:font script="Telu" typeface="Gautami"/>
+        <a:font script="Taml" typeface="Latha"/>
+        <a:font script="Syrc" typeface="Estrangelo Edessa"/>
+        <a:font script="Orya" typeface="Kalinga"/>
+        <a:font script="Mlym" typeface="Kartika"/>
+        <a:font script="Laoo" typeface="DokChampa"/>
+        <a:font script="Sinh" typeface="Iskoola Pota"/>
+        <a:font script="Mong" typeface="Mongolian Baiti"/>
+        <a:font script="Viet" typeface="Arial"/>
+        <a:font script="Uigh" typeface="Microsoft Uighur"/>
+        <a:font script="Geor" typeface="Sylfaen"/>
+        <a:font script="Armn" typeface="Arial"/>
+        <a:font script="Bugi" typeface="Leelawadee UI"/>
+        <a:font script="Bopo" typeface="Microsoft JhengHei"/>
+        <a:font script="Java" typeface="Javanese Text"/>
+        <a:font script="Lisu" typeface="Segoe UI"/>
+        <a:font script="Mymr" typeface="Myanmar Text"/>
+        <a:font script="Nkoo" typeface="Ebrima"/>
+        <a:font script="Olck" typeface="Nirmala UI"/>
+        <a:font script="Osma" typeface="Ebrima"/>
+        <a:font script="Phag" typeface="Phagspa"/>
+        <a:font script="Syrn" typeface="Estrangelo Edessa"/>
+        <a:font script="Syrj" typeface="Estrangelo Edessa"/>
+        <a:font script="Syre" typeface="Estrangelo Edessa"/>
+        <a:font script="Sora" typeface="Nirmala UI"/>
+        <a:font script="Tale" typeface="Microsoft Tai Le"/>
+        <a:font script="Talu" typeface="Microsoft New Tai Lue"/>
+        <a:font script="Tfng" typeface="Ebrima"/>
+      </a:minorFont>
+    </a:fontScheme>
+    <a:fmtScheme name="Office">
+      <a:fillStyleLst>
+        <a:solidFill>
+          <a:schemeClr val="phClr"/>
+        </a:solidFill>
+        <a:gradFill rotWithShape="1">
+          <a:gsLst>
+            <a:gs pos="0">
+              <a:schemeClr val="phClr">
+                <a:lumMod val="110000"/>
+                <a:satMod val="105000"/>
+                <a:tint val="67000"/>
+              </a:schemeClr>
+            </a:gs>
+            <a:gs pos="50000">
+              <a:schemeClr val="phClr">
+                <a:lumMod val="105000"/>
+                <a:satMod val="103000"/>
+                <a:tint val="73000"/>
+              </a:schemeClr>
+            </a:gs>
+            <a:gs pos="100000">
+              <a:schemeClr val="phClr">
+                <a:lumMod val="105000"/>
+                <a:satMod val="109000"/>
+                <a:tint val="81000"/>
+              </a:schemeClr>
+            </a:gs>
+          </a:gsLst>
+          <a:lin ang="5400000" scaled="0"/>
+        </a:gradFill>
+        <a:gradFill rotWithShape="1">
+          <a:gsLst>
+            <a:gs pos="0">
+              <a:schemeClr val="phClr">
+                <a:satMod val="103000"/>
+                <a:lumMod val="102000"/>
+                <a:tint val="94000"/>
+              </a:schemeClr>
+            </a:gs>
+            <a:gs pos="50000">
+              <a:schemeClr val="phClr">
+                <a:satMod val="110000"/>
+                <a:lumMod val="100000"/>
+                <a:shade val="100000"/>
+              </a:schemeClr>
+            </a:gs>
+            <a:gs pos="100000">
+              <a:schemeClr val="phClr">
+                <a:lumMod val="99000"/>
+                <a:satMod val="120000"/>
+                <a:shade val="78000"/>
+              </a:schemeClr>
+            </a:gs>
+          </a:gsLst>
+          <a:lin ang="5400000" scaled="0"/>
+        </a:gradFill>
+      </a:fillStyleLst>
+      <a:lnStyleLst>
+        <a:ln w="12700" cap="flat" cmpd="sng" algn="ctr">
+          <a:solidFill>
+            <a:schemeClr val="phClr"/>
+          </a:solidFill>
+          <a:prstDash val="solid"/>
+          <a:miter lim="800000"/>
+        </a:ln>
+        <a:ln w="19050" cap="flat" cmpd="sng" algn="ctr">
+          <a:solidFill>
+            <a:schemeClr val="phClr"/>
+          </a:solidFill>
+          <a:prstDash val="solid"/>
+          <a:miter lim="800000"/>
+        </a:ln>
+        <a:ln w="25400" cap="flat" cmpd="sng" algn="ctr">
+          <a:solidFill>
+            <a:schemeClr val="phClr"/>
+          </a:solidFill>
+          <a:prstDash val="solid"/>
+          <a:miter lim="800000"/>
+        </a:ln>
+      </a:lnStyleLst>
+      <a:effectStyleLst>
+        <a:effectStyle>
+          <a:effectLst/>
+        </a:effectStyle>
+        <a:effectStyle>
+          <a:effectLst/>
+        </a:effectStyle>
+        <a:effectStyle>
+          <a:effectLst>
+            <a:outerShdw blurRad="57150" dist="19050" dir="5400000" algn="ctr" rotWithShape="0">
+              <a:srgbClr val="000000">
+                <a:alpha val="63000"/>
+              </a:srgbClr>
+            </a:outerShdw>
+          </a:effectLst>
+        </a:effectStyle>
+      </a:effectStyleLst>
+      <a:bgFillStyleLst>
+        <a:solidFill>
+          <a:schemeClr val="phClr"/>
+        </a:solidFill>
+        <a:solidFill>
+          <a:schemeClr val="phClr">
+            <a:tint val="95000"/>
+            <a:satMod val="170000"/>
+          </a:schemeClr>
+        </a:solidFill>
+        <a:gradFill rotWithShape="1">
+          <a:gsLst>
+            <a:gs pos="0">
+              <a:schemeClr val="phClr">
+                <a:tint val="93000"/>
+                <a:satMod val="150000"/>
+                <a:shade val="98000"/>
+                <a:lumMod val="102000"/>
+              </a:schemeClr>
+            </a:gs>
+            <a:gs pos="50000">
+              <a:schemeClr val="phClr">
+                <a:tint val="98000"/>
+                <a:satMod val="130000"/>
+                <a:shade val="90000"/>
+                <a:lumMod val="103000"/>
+              </a:schemeClr>
+            </a:gs>
+            <a:gs pos="100000">
+              <a:schemeClr val="phClr">
+                <a:shade val="63000"/>
+                <a:satMod val="120000"/>
+              </a:schemeClr>
+            </a:gs>
+          </a:gsLst>
+          <a:lin ang="5400000" scaled="0"/>
+        </a:gradFill>
+      </a:bgFillStyleLst>
+    </a:fmtScheme>
+  </a:themeElements>
+  <a:objectDefaults>
+    <a:lnDef>
+      <a:spPr/>
+      <a:bodyPr/>
+      <a:lstStyle/>
+      <a:style>
+        <a:lnRef idx="2">
+          <a:schemeClr val="accent1"/>
+        </a:lnRef>
+        <a:fillRef idx="0">
+          <a:schemeClr val="accent1"/>
+        </a:fillRef>
+        <a:effectRef idx="1">
+          <a:schemeClr val="accent1"/>
+        </a:effectRef>
+        <a:fontRef idx="minor">
+          <a:schemeClr val="tx1"/>
+        </a:fontRef>
+      </a:style>
+    </a:lnDef>
+  </a:objectDefaults>
+  <a:extraClrSchemeLst/>
+  <a:extLst>
+    <a:ext uri="{05A4C25C-085E-4340-85A3-A5531E510DB2}">
+      <thm15:themeFamily xmlns:thm15="http://schemas.microsoft.com/office/thememl/2012/main" name="Office Theme" id="{2E142A2C-CD16-42D6-873A-C26D2A0506FA}" vid="{1BDDFF52-6CD6-40A5-AB3C-68EB2F1E4D0A}"/>
+    </a:ext>
+  </a:extLst>
+</a:theme>
 </file>
--- a/Personal_Finance_Analyzer_Presentation.pptx
+++ b/Personal_Finance_Analyzer_Presentation.pptx
@@ -12604,7 +12604,7 @@
           <a:p>
             <a:r>
               <a:rPr lang="en-US" sz="2000" dirty="0"/>
-              <a:t>✓ Predicted month (December 2025): €2086</a:t>
+              <a:t>✓ Predicted next month (December 2025): €2086</a:t>
             </a:r>
           </a:p>
           <a:p>
@@ -13260,7 +13260,23 @@
                   <a:schemeClr val="tx1"/>
                 </a:solidFill>
               </a:rPr>
-              <a:t> </a:t>
+              <a:t>     (96% </a:t>
+            </a:r>
+            <a:r>
+              <a:rPr lang="nl-NL" dirty="0" err="1">
+                <a:solidFill>
+                  <a:schemeClr val="tx1"/>
+                </a:solidFill>
+              </a:rPr>
+              <a:t>accuracy</a:t>
+            </a:r>
+            <a:r>
+              <a:rPr lang="nl-NL" dirty="0">
+                <a:solidFill>
+                  <a:schemeClr val="tx1"/>
+                </a:solidFill>
+              </a:rPr>
+              <a:t>) </a:t>
             </a:r>
           </a:p>
           <a:p>

--- a/Personal_Finance_Analyzer_Presentation.pptx
+++ b/Personal_Finance_Analyzer_Presentation.pptx
@@ -742,15 +742,15 @@
           </a:p>
           <a:p>
             <a:r>
-              <a:rPr lang="en-US"/>
+              <a:rPr lang="en-US" dirty="0"/>
               <a:t>The </a:t>
             </a:r>
             <a:r>
-              <a:rPr lang="en-US" b="1"/>
+              <a:rPr lang="en-US" b="1" dirty="0"/>
               <a:t>anomaly detection</a:t>
             </a:r>
             <a:r>
-              <a:rPr lang="en-US"/>
+              <a:rPr lang="en-US" dirty="0"/>
               <a:t> system helps catch unusual categorizations</a:t>
             </a:r>
           </a:p>
@@ -12345,13 +12345,21 @@
           <a:p>
             <a:r>
               <a:rPr lang="en-US" dirty="0"/>
-              <a:t>✓ Fast to train - minimal computation </a:t>
-            </a:r>
-          </a:p>
-          <a:p>
+              <a:t>✓ Fast to </a:t>
+            </a:r>
+            <a:r>
+              <a:rPr lang="en-US"/>
+              <a:t>train </a:t>
+            </a:r>
+          </a:p>
+          <a:p>
+            <a:r>
+              <a:rPr lang="en-US"/>
+              <a:t>⚠️ </a:t>
+            </a:r>
             <a:r>
               <a:rPr lang="en-US" dirty="0"/>
-              <a:t>⚠️ Assumption: Spending behavior remains relatively stable</a:t>
+              <a:t>Assumption: Spending behavior remains relatively stable</a:t>
             </a:r>
             <a:endParaRPr lang="nl-NL" dirty="0"/>
           </a:p>
